--- a/reports/slide_v4/VOLT-FORGE_Round1_Slide.pptx
+++ b/reports/slide_v4/VOLT-FORGE_Round1_Slide.pptx
@@ -114,255 +114,460 @@
 </p:presentation>
 </file>
 
-<file path=ppt/charts/chart1.xml><?xml version="1.0" encoding="utf-8"?>
-<c:chartSpace xmlns:c="http://schemas.openxmlformats.org/drawingml/2006/chart" xmlns:a="http://schemas.openxmlformats.org/drawingml/2006/main" xmlns:r="http://schemas.openxmlformats.org/officeDocument/2006/relationships">
-  <c:date1904 val="0"/>
-  <c:chart>
-    <c:autoTitleDeleted val="1"/>
-    <c:plotArea>
-      <c:barChart>
-        <c:barDir val="bar"/>
-        <c:grouping val="clustered"/>
-        <c:ser>
-          <c:idx val="0"/>
-          <c:order val="0"/>
-          <c:tx>
-            <c:strRef>
-              <c:f>Sheet1!$B$1</c:f>
-              <c:strCache>
-                <c:ptCount val="1"/>
-                <c:pt idx="0">
-                  <c:v>Simulated, low cooling</c:v>
-                </c:pt>
-              </c:strCache>
-            </c:strRef>
-          </c:tx>
-          <c:spPr>
+<file path=ppt/notesMasters/notesMaster1.xml><?xml version="1.0" encoding="utf-8"?>
+<p:notesMaster xmlns:a="http://schemas.openxmlformats.org/drawingml/2006/main" xmlns:p="http://schemas.openxmlformats.org/presentationml/2006/main" xmlns:r="http://schemas.openxmlformats.org/officeDocument/2006/relationships">
+  <p:cSld>
+    <p:bg>
+      <p:bgRef idx="1001">
+        <a:schemeClr val="bg1"/>
+      </p:bgRef>
+    </p:bg>
+    <p:spTree>
+      <p:nvGrpSpPr>
+        <p:cNvPr id="1" name=""/>
+        <p:cNvGrpSpPr/>
+        <p:nvPr/>
+      </p:nvGrpSpPr>
+      <p:grpSpPr>
+        <a:xfrm>
+          <a:off x="0" y="0"/>
+          <a:ext cx="0" cy="0"/>
+          <a:chOff x="0" y="0"/>
+          <a:chExt cx="0" cy="0"/>
+        </a:xfrm>
+      </p:grpSpPr>
+      <p:sp>
+        <p:nvSpPr>
+          <p:cNvPr id="2" name="Header Placeholder 1"/>
+          <p:cNvSpPr>
+            <a:spLocks noGrp="1"/>
+          </p:cNvSpPr>
+          <p:nvPr>
+            <p:ph type="hdr" sz="quarter"/>
+          </p:nvPr>
+        </p:nvSpPr>
+        <p:spPr>
+          <a:xfrm>
+            <a:off x="0" y="0"/>
+            <a:ext cx="2971800" cy="457200"/>
+          </a:xfrm>
+          <a:prstGeom prst="rect">
+            <a:avLst/>
+          </a:prstGeom>
+        </p:spPr>
+        <p:txBody>
+          <a:bodyPr vert="horz" lIns="91440" tIns="45720" rIns="91440" bIns="45720" rtlCol="0"/>
+          <a:lstStyle>
+            <a:lvl1pPr algn="l">
+              <a:defRPr sz="1200"/>
+            </a:lvl1pPr>
+          </a:lstStyle>
+          <a:p>
+            <a:endParaRPr lang="en-US"/>
+          </a:p>
+        </p:txBody>
+      </p:sp>
+      <p:sp>
+        <p:nvSpPr>
+          <p:cNvPr id="3" name="Date Placeholder 2"/>
+          <p:cNvSpPr>
+            <a:spLocks noGrp="1"/>
+          </p:cNvSpPr>
+          <p:nvPr>
+            <p:ph type="dt" idx="1"/>
+          </p:nvPr>
+        </p:nvSpPr>
+        <p:spPr>
+          <a:xfrm>
+            <a:off x="3884613" y="0"/>
+            <a:ext cx="2971800" cy="457200"/>
+          </a:xfrm>
+          <a:prstGeom prst="rect">
+            <a:avLst/>
+          </a:prstGeom>
+        </p:spPr>
+        <p:txBody>
+          <a:bodyPr vert="horz" lIns="91440" tIns="45720" rIns="91440" bIns="45720" rtlCol="0"/>
+          <a:lstStyle>
+            <a:lvl1pPr algn="r">
+              <a:defRPr sz="1200"/>
+            </a:lvl1pPr>
+          </a:lstStyle>
+          <a:p>
+            <a:fld id="{0F89C1C7-3DCD-1040-A9CF-14679D8B5DDD}" type="datetimeFigureOut">
+              <a:rPr lang="en-US" smtClean="0"/>
+              <a:t>10/17/16</a:t>
+            </a:fld>
+            <a:endParaRPr lang="en-US"/>
+          </a:p>
+        </p:txBody>
+      </p:sp>
+      <p:sp>
+        <p:nvSpPr>
+          <p:cNvPr id="4" name="Slide Image Placeholder 3"/>
+          <p:cNvSpPr>
+            <a:spLocks noGrp="1" noRot="1" noChangeAspect="1"/>
+          </p:cNvSpPr>
+          <p:nvPr>
+            <p:ph type="sldImg" idx="2"/>
+          </p:nvPr>
+        </p:nvSpPr>
+        <p:spPr>
+          <a:xfrm>
+            <a:off x="1143000" y="685800"/>
+            <a:ext cx="4572000" cy="3429000"/>
+          </a:xfrm>
+          <a:prstGeom prst="rect">
+            <a:avLst/>
+          </a:prstGeom>
+          <a:noFill/>
+          <a:ln w="12700">
             <a:solidFill>
-              <a:srgbClr val="A9D8F0"/>
-            </a:solidFill>
-          </c:spPr>
-          <c:cat>
-            <c:strRef>
-              <c:f>Sheet1!$A$2:$A$3</c:f>
-              <c:strCache>
-                <c:ptCount val="2"/>
-                <c:pt idx="0">
-                  <c:v>Four-cell rig, 14.6 A</c:v>
-                </c:pt>
-                <c:pt idx="1">
-                  <c:v>Single cell, 5 A</c:v>
-                </c:pt>
-              </c:strCache>
-            </c:strRef>
-          </c:cat>
-          <c:val>
-            <c:numRef>
-              <c:f>Sheet1!$B$2:$B$3</c:f>
-              <c:numCache>
-                <c:formatCode>General</c:formatCode>
-                <c:ptCount val="2"/>
-                <c:pt idx="0">
-                  <c:v>13.5</c:v>
-                </c:pt>
-                <c:pt idx="1">
-                  <c:v>15.9</c:v>
-                </c:pt>
-              </c:numCache>
-            </c:numRef>
-          </c:val>
-        </c:ser>
-        <c:ser>
-          <c:idx val="1"/>
-          <c:order val="1"/>
-          <c:tx>
-            <c:strRef>
-              <c:f>Sheet1!$C$1</c:f>
-              <c:strCache>
-                <c:ptCount val="1"/>
-                <c:pt idx="0">
-                  <c:v>Simulated, default</c:v>
-                </c:pt>
-              </c:strCache>
-            </c:strRef>
-          </c:tx>
-          <c:spPr>
-            <a:solidFill>
-              <a:srgbClr val="00A0E0"/>
-            </a:solidFill>
-          </c:spPr>
-          <c:cat>
-            <c:strRef>
-              <c:f>Sheet1!$A$2:$A$3</c:f>
-              <c:strCache>
-                <c:ptCount val="2"/>
-                <c:pt idx="0">
-                  <c:v>Four-cell rig, 14.6 A</c:v>
-                </c:pt>
-                <c:pt idx="1">
-                  <c:v>Single cell, 5 A</c:v>
-                </c:pt>
-              </c:strCache>
-            </c:strRef>
-          </c:cat>
-          <c:val>
-            <c:numRef>
-              <c:f>Sheet1!$C$2:$C$3</c:f>
-              <c:numCache>
-                <c:formatCode>General</c:formatCode>
-                <c:ptCount val="2"/>
-                <c:pt idx="0">
-                  <c:v>8.4</c:v>
-                </c:pt>
-                <c:pt idx="1">
-                  <c:v>9.6</c:v>
-                </c:pt>
-              </c:numCache>
-            </c:numRef>
-          </c:val>
-        </c:ser>
-        <c:ser>
-          <c:idx val="2"/>
-          <c:order val="2"/>
-          <c:tx>
-            <c:strRef>
-              <c:f>Sheet1!$D$1</c:f>
-              <c:strCache>
-                <c:ptCount val="1"/>
-                <c:pt idx="0">
-                  <c:v>Measured</c:v>
-                </c:pt>
-              </c:strCache>
-            </c:strRef>
-          </c:tx>
-          <c:spPr>
-            <a:solidFill>
-              <a:srgbClr val="231F20"/>
-            </a:solidFill>
-          </c:spPr>
-          <c:cat>
-            <c:strRef>
-              <c:f>Sheet1!$A$2:$A$3</c:f>
-              <c:strCache>
-                <c:ptCount val="2"/>
-                <c:pt idx="0">
-                  <c:v>Four-cell rig, 14.6 A</c:v>
-                </c:pt>
-                <c:pt idx="1">
-                  <c:v>Single cell, 5 A</c:v>
-                </c:pt>
-              </c:strCache>
-            </c:strRef>
-          </c:cat>
-          <c:val>
-            <c:numRef>
-              <c:f>Sheet1!$D$2:$D$3</c:f>
-              <c:numCache>
-                <c:formatCode>General</c:formatCode>
-                <c:ptCount val="2"/>
-                <c:pt idx="0">
-                  <c:v>5.3</c:v>
-                </c:pt>
-                <c:pt idx="1">
-                  <c:v>16.2</c:v>
-                </c:pt>
-              </c:numCache>
-            </c:numRef>
-          </c:val>
-        </c:ser>
-        <c:dLbls>
-          <c:numFmt formatCode="0.0" sourceLinked="0"/>
-          <c:txPr>
-            <a:bodyPr/>
-            <a:lstStyle/>
-            <a:p>
-              <a:pPr>
-                <a:defRPr sz="750"/>
-              </a:pPr>
-            </a:p>
-          </c:txPr>
-          <c:dLblPos val="outEnd"/>
-          <c:showLegendKey val="0"/>
-          <c:showVal val="1"/>
-          <c:showCatName val="0"/>
-          <c:showSerName val="0"/>
-          <c:showPercent val="0"/>
-          <c:showBubbleSize val="0"/>
-          <c:showLeaderLines val="1"/>
-        </c:dLbls>
-        <c:gapWidth val="40"/>
-        <c:axId val="-2068027336"/>
-        <c:axId val="-2113994440"/>
-      </c:barChart>
-      <c:catAx>
-        <c:axId val="-2068027336"/>
-        <c:scaling>
-          <c:orientation val="minMax"/>
-        </c:scaling>
-        <c:delete val="0"/>
-        <c:axPos val="l"/>
-        <c:majorTickMark val="out"/>
-        <c:minorTickMark val="none"/>
-        <c:tickLblPos val="nextTo"/>
-        <c:spPr>
-          <a:ln>
-            <a:solidFill>
-              <a:srgbClr val="C9D8E4"/>
+              <a:prstClr val="black"/>
             </a:solidFill>
           </a:ln>
-        </c:spPr>
-        <c:crossAx val="-2113994440"/>
-        <c:crosses val="autoZero"/>
-        <c:auto val="1"/>
-        <c:lblAlgn val="ctr"/>
-        <c:lblOffset val="100"/>
-        <c:noMultiLvlLbl val="0"/>
-      </c:catAx>
-      <c:valAx>
-        <c:axId val="-2113994440"/>
-        <c:scaling>
-          <c:min val="0.0"/>
-        </c:scaling>
-        <c:delete/>
-        <c:axPos val="b"/>
-        <c:majorTickMark val="out"/>
-        <c:minorTickMark val="none"/>
-        <c:tickLblPos val="nextTo"/>
-        <c:crossAx val="-2068027336"/>
-        <c:crosses val="autoZero"/>
-      </c:valAx>
-    </c:plotArea>
-    <c:legend>
-      <c:legendPos val="b"/>
-      <c:overlay val="0"/>
-      <c:txPr>
-        <a:bodyPr/>
-        <a:lstStyle/>
-        <a:p>
-          <a:pPr>
-            <a:defRPr sz="700"/>
-          </a:pPr>
-        </a:p>
-      </c:txPr>
-    </c:legend>
-    <c:dispBlanksAs val="gap"/>
-  </c:chart>
-  <c:txPr>
-    <a:bodyPr/>
-    <a:lstStyle/>
-    <a:p>
-      <a:pPr>
-        <a:defRPr sz="750">
-          <a:latin typeface="Calibri"/>
-        </a:defRPr>
-      </a:pPr>
-      <a:endParaRPr lang="en-US"/>
-    </a:p>
-  </c:txPr>
-  <c:externalData r:id="rId1">
-    <c:autoUpdate val="0"/>
-  </c:externalData>
-</c:chartSpace>
+        </p:spPr>
+        <p:txBody>
+          <a:bodyPr vert="horz" lIns="91440" tIns="45720" rIns="91440" bIns="45720" rtlCol="0" anchor="ctr"/>
+          <a:lstStyle/>
+          <a:p>
+            <a:endParaRPr lang="en-US"/>
+          </a:p>
+        </p:txBody>
+      </p:sp>
+      <p:sp>
+        <p:nvSpPr>
+          <p:cNvPr id="5" name="Notes Placeholder 4"/>
+          <p:cNvSpPr>
+            <a:spLocks noGrp="1"/>
+          </p:cNvSpPr>
+          <p:nvPr>
+            <p:ph type="body" sz="quarter" idx="3"/>
+          </p:nvPr>
+        </p:nvSpPr>
+        <p:spPr>
+          <a:xfrm>
+            <a:off x="685800" y="4343400"/>
+            <a:ext cx="5486400" cy="4114800"/>
+          </a:xfrm>
+          <a:prstGeom prst="rect">
+            <a:avLst/>
+          </a:prstGeom>
+        </p:spPr>
+        <p:txBody>
+          <a:bodyPr vert="horz" lIns="91440" tIns="45720" rIns="91440" bIns="45720" rtlCol="0"/>
+          <a:lstStyle/>
+          <a:p>
+            <a:pPr lvl="0"/>
+            <a:r>
+              <a:rPr lang="en-US" smtClean="0"/>
+              <a:t>Click to edit Master text styles</a:t>
+            </a:r>
+          </a:p>
+          <a:p>
+            <a:pPr lvl="1"/>
+            <a:r>
+              <a:rPr lang="en-US" smtClean="0"/>
+              <a:t>Second level</a:t>
+            </a:r>
+          </a:p>
+          <a:p>
+            <a:pPr lvl="2"/>
+            <a:r>
+              <a:rPr lang="en-US" smtClean="0"/>
+              <a:t>Third level</a:t>
+            </a:r>
+          </a:p>
+          <a:p>
+            <a:pPr lvl="3"/>
+            <a:r>
+              <a:rPr lang="en-US" smtClean="0"/>
+              <a:t>Fourth level</a:t>
+            </a:r>
+          </a:p>
+          <a:p>
+            <a:pPr lvl="4"/>
+            <a:r>
+              <a:rPr lang="en-US" smtClean="0"/>
+              <a:t>Fifth level</a:t>
+            </a:r>
+            <a:endParaRPr lang="en-US"/>
+          </a:p>
+        </p:txBody>
+      </p:sp>
+      <p:sp>
+        <p:nvSpPr>
+          <p:cNvPr id="6" name="Footer Placeholder 5"/>
+          <p:cNvSpPr>
+            <a:spLocks noGrp="1"/>
+          </p:cNvSpPr>
+          <p:nvPr>
+            <p:ph type="ftr" sz="quarter" idx="4"/>
+          </p:nvPr>
+        </p:nvSpPr>
+        <p:spPr>
+          <a:xfrm>
+            <a:off x="0" y="8685213"/>
+            <a:ext cx="2971800" cy="457200"/>
+          </a:xfrm>
+          <a:prstGeom prst="rect">
+            <a:avLst/>
+          </a:prstGeom>
+        </p:spPr>
+        <p:txBody>
+          <a:bodyPr vert="horz" lIns="91440" tIns="45720" rIns="91440" bIns="45720" rtlCol="0" anchor="b"/>
+          <a:lstStyle>
+            <a:lvl1pPr algn="l">
+              <a:defRPr sz="1200"/>
+            </a:lvl1pPr>
+          </a:lstStyle>
+          <a:p>
+            <a:endParaRPr lang="en-US"/>
+          </a:p>
+        </p:txBody>
+      </p:sp>
+      <p:sp>
+        <p:nvSpPr>
+          <p:cNvPr id="7" name="Slide Number Placeholder 6"/>
+          <p:cNvSpPr>
+            <a:spLocks noGrp="1"/>
+          </p:cNvSpPr>
+          <p:nvPr>
+            <p:ph type="sldNum" sz="quarter" idx="5"/>
+          </p:nvPr>
+        </p:nvSpPr>
+        <p:spPr>
+          <a:xfrm>
+            <a:off x="3884613" y="8685213"/>
+            <a:ext cx="2971800" cy="457200"/>
+          </a:xfrm>
+          <a:prstGeom prst="rect">
+            <a:avLst/>
+          </a:prstGeom>
+        </p:spPr>
+        <p:txBody>
+          <a:bodyPr vert="horz" lIns="91440" tIns="45720" rIns="91440" bIns="45720" rtlCol="0" anchor="b"/>
+          <a:lstStyle>
+            <a:lvl1pPr algn="r">
+              <a:defRPr sz="1200"/>
+            </a:lvl1pPr>
+          </a:lstStyle>
+          <a:p>
+            <a:fld id="{BB5E49A5-4136-284D-997B-48E1D791AD67}" type="slidenum">
+              <a:rPr lang="en-US" smtClean="0"/>
+              <a:t>‹#›</a:t>
+            </a:fld>
+            <a:endParaRPr lang="en-US"/>
+          </a:p>
+        </p:txBody>
+      </p:sp>
+    </p:spTree>
+    <p:extLst>
+      <p:ext uri="{BB962C8B-B14F-4D97-AF65-F5344CB8AC3E}">
+        <p14:creationId xmlns:p14="http://schemas.microsoft.com/office/powerpoint/2010/main" val="2623252185"/>
+      </p:ext>
+    </p:extLst>
+  </p:cSld>
+  <p:clrMap bg1="lt1" tx1="dk1" bg2="lt2" tx2="dk2" accent1="accent1" accent2="accent2" accent3="accent3" accent4="accent4" accent5="accent5" accent6="accent6" hlink="hlink" folHlink="folHlink"/>
+  <p:notesStyle>
+    <a:lvl1pPr marL="0" algn="l" defTabSz="457200" rtl="0" eaLnBrk="1" latinLnBrk="0" hangingPunct="1">
+      <a:defRPr sz="1200" kern="1200">
+        <a:solidFill>
+          <a:schemeClr val="tx1"/>
+        </a:solidFill>
+        <a:latin typeface="+mn-lt"/>
+        <a:ea typeface="+mn-ea"/>
+        <a:cs typeface="+mn-cs"/>
+      </a:defRPr>
+    </a:lvl1pPr>
+    <a:lvl2pPr marL="457200" algn="l" defTabSz="457200" rtl="0" eaLnBrk="1" latinLnBrk="0" hangingPunct="1">
+      <a:defRPr sz="1200" kern="1200">
+        <a:solidFill>
+          <a:schemeClr val="tx1"/>
+        </a:solidFill>
+        <a:latin typeface="+mn-lt"/>
+        <a:ea typeface="+mn-ea"/>
+        <a:cs typeface="+mn-cs"/>
+      </a:defRPr>
+    </a:lvl2pPr>
+    <a:lvl3pPr marL="914400" algn="l" defTabSz="457200" rtl="0" eaLnBrk="1" latinLnBrk="0" hangingPunct="1">
+      <a:defRPr sz="1200" kern="1200">
+        <a:solidFill>
+          <a:schemeClr val="tx1"/>
+        </a:solidFill>
+        <a:latin typeface="+mn-lt"/>
+        <a:ea typeface="+mn-ea"/>
+        <a:cs typeface="+mn-cs"/>
+      </a:defRPr>
+    </a:lvl3pPr>
+    <a:lvl4pPr marL="1371600" algn="l" defTabSz="457200" rtl="0" eaLnBrk="1" latinLnBrk="0" hangingPunct="1">
+      <a:defRPr sz="1200" kern="1200">
+        <a:solidFill>
+          <a:schemeClr val="tx1"/>
+        </a:solidFill>
+        <a:latin typeface="+mn-lt"/>
+        <a:ea typeface="+mn-ea"/>
+        <a:cs typeface="+mn-cs"/>
+      </a:defRPr>
+    </a:lvl4pPr>
+    <a:lvl5pPr marL="1828800" algn="l" defTabSz="457200" rtl="0" eaLnBrk="1" latinLnBrk="0" hangingPunct="1">
+      <a:defRPr sz="1200" kern="1200">
+        <a:solidFill>
+          <a:schemeClr val="tx1"/>
+        </a:solidFill>
+        <a:latin typeface="+mn-lt"/>
+        <a:ea typeface="+mn-ea"/>
+        <a:cs typeface="+mn-cs"/>
+      </a:defRPr>
+    </a:lvl5pPr>
+    <a:lvl6pPr marL="2286000" algn="l" defTabSz="457200" rtl="0" eaLnBrk="1" latinLnBrk="0" hangingPunct="1">
+      <a:defRPr sz="1200" kern="1200">
+        <a:solidFill>
+          <a:schemeClr val="tx1"/>
+        </a:solidFill>
+        <a:latin typeface="+mn-lt"/>
+        <a:ea typeface="+mn-ea"/>
+        <a:cs typeface="+mn-cs"/>
+      </a:defRPr>
+    </a:lvl6pPr>
+    <a:lvl7pPr marL="2743200" algn="l" defTabSz="457200" rtl="0" eaLnBrk="1" latinLnBrk="0" hangingPunct="1">
+      <a:defRPr sz="1200" kern="1200">
+        <a:solidFill>
+          <a:schemeClr val="tx1"/>
+        </a:solidFill>
+        <a:latin typeface="+mn-lt"/>
+        <a:ea typeface="+mn-ea"/>
+        <a:cs typeface="+mn-cs"/>
+      </a:defRPr>
+    </a:lvl7pPr>
+    <a:lvl8pPr marL="3200400" algn="l" defTabSz="457200" rtl="0" eaLnBrk="1" latinLnBrk="0" hangingPunct="1">
+      <a:defRPr sz="1200" kern="1200">
+        <a:solidFill>
+          <a:schemeClr val="tx1"/>
+        </a:solidFill>
+        <a:latin typeface="+mn-lt"/>
+        <a:ea typeface="+mn-ea"/>
+        <a:cs typeface="+mn-cs"/>
+      </a:defRPr>
+    </a:lvl8pPr>
+    <a:lvl9pPr marL="3657600" algn="l" defTabSz="457200" rtl="0" eaLnBrk="1" latinLnBrk="0" hangingPunct="1">
+      <a:defRPr sz="1200" kern="1200">
+        <a:solidFill>
+          <a:schemeClr val="tx1"/>
+        </a:solidFill>
+        <a:latin typeface="+mn-lt"/>
+        <a:ea typeface="+mn-ea"/>
+        <a:cs typeface="+mn-cs"/>
+      </a:defRPr>
+    </a:lvl9pPr>
+  </p:notesStyle>
+</p:notesMaster>
+</file>
+
+<file path=ppt/notesSlides/notesSlide1.xml><?xml version="1.0" encoding="utf-8"?>
+<p:notes xmlns:a="http://schemas.openxmlformats.org/drawingml/2006/main" xmlns:p="http://schemas.openxmlformats.org/presentationml/2006/main" xmlns:r="http://schemas.openxmlformats.org/officeDocument/2006/relationships">
+  <p:cSld>
+    <p:spTree>
+      <p:nvGrpSpPr>
+        <p:cNvPr id="1" name=""/>
+        <p:cNvGrpSpPr/>
+        <p:nvPr/>
+      </p:nvGrpSpPr>
+      <p:grpSpPr>
+        <a:xfrm>
+          <a:off x="0" y="0"/>
+          <a:ext cx="0" cy="0"/>
+          <a:chOff x="0" y="0"/>
+          <a:chExt cx="0" cy="0"/>
+        </a:xfrm>
+      </p:grpSpPr>
+      <p:sp>
+        <p:nvSpPr>
+          <p:cNvPr id="2" name="Slide Image Placeholder 1"/>
+          <p:cNvSpPr>
+            <a:spLocks noGrp="1"/>
+          </p:cNvSpPr>
+          <p:nvPr>
+            <p:ph type="sldImg" idx="2"/>
+          </p:nvPr>
+        </p:nvSpPr>
+        <p:spPr/>
+      </p:sp>
+      <p:sp>
+        <p:nvSpPr>
+          <p:cNvPr id="3" name="Notes Placeholder 2"/>
+          <p:cNvSpPr>
+            <a:spLocks noGrp="1"/>
+          </p:cNvSpPr>
+          <p:nvPr>
+            <p:ph type="body" idx="3" sz="quarter"/>
+          </p:nvPr>
+        </p:nvSpPr>
+        <p:spPr/>
+        <p:txBody>
+          <a:bodyPr/>
+          <a:lstStyle/>
+          <a:p>
+            <a:r>
+              <a:t>Simulation only. Nothing has been built or measured.</a:t>
+            </a:r>
+          </a:p>
+          <a:p/>
+          <a:p>
+            <a:r>
+              <a:t>Result: Smallest qualifying design among the parallel arrangements tested. Recommended: 2 LG M50T cells with the output at the far cell. 33 of 33 required Pi cases passed, worst-case cell current 5.33 A against a 7.275 A limit.</a:t>
+            </a:r>
+          </a:p>
+          <a:p>
+            <a:r>
+              <a:t>Limits: 2 of 62 mixed samples were refused at the 12 A stress test; all 62 passed at the Pi load. No link option won every case.</a:t>
+            </a:r>
+          </a:p>
+          <a:p>
+            <a:r>
+              <a:t>Mission: 25 W from the Raspberry Pi 5 supply recommendation, an assumed 90% converter and an assumed 3.3 V floor give 8.42 A, held constant as an approximation. Run time and room temperature are assumptions.</a:t>
+            </a:r>
+          </a:p>
+          <a:p>
+            <a:r>
+              <a:t>Real data: all 12 pre-declared comparison cases missed their bands. Sources: Chen et al. 2020 (LG M50, zenodo.4032561) and Piombo et al. 2024 test 28 (M50T, 10.17632/zh58byr53c.2).</a:t>
+            </a:r>
+          </a:p>
+          <a:p>
+            <a:r>
+              <a:t>Not proven: the Geekworm X1206 V2.0 board running on two cells, a real Pi draw, or measured accuracy.</a:t>
+            </a:r>
+          </a:p>
+          <a:p>
+            <a:r>
+              <a:t>Cost: cells only, Robu LG M50T Rs 1,206 including GST, listed out of stock, checked 30 Oct 2026. Excludes shipping and fabrication.</a:t>
+            </a:r>
+          </a:p>
+          <a:p>
+            <a:r>
+              <a:t>Market: AISHE 2021-22. The price of Rs 50,000 a lab and 5% reach are assumptions, and counts do not show willingness to pay.</a:t>
+            </a:r>
+          </a:p>
+        </p:txBody>
+      </p:sp>
+      <p:sp>
+        <p:nvSpPr>
+          <p:cNvPr id="4" name="Slide Number Placeholder 3"/>
+          <p:cNvSpPr>
+            <a:spLocks noGrp="1"/>
+          </p:cNvSpPr>
+          <p:nvPr>
+            <p:ph type="sldNum" idx="5" sz="quarter"/>
+          </p:nvPr>
+        </p:nvSpPr>
+        <p:spPr/>
+      </p:sp>
+    </p:spTree>
+  </p:cSld>
+  <p:clrMapOvr>
+    <a:masterClrMapping/>
+  </p:clrMapOvr>
+</p:notes>
 </file>
 
 <file path=ppt/slideLayouts/slideLayout1.xml><?xml version="1.0" encoding="utf-8"?>
@@ -6456,34 +6661,17 @@
         </p:nvSpPr>
         <p:spPr>
           <a:xfrm>
-            <a:off x="2413000" y="63500"/>
-            <a:ext cx="8788400" cy="355600"/>
+            <a:off x="1017714" y="898058"/>
+            <a:ext cx="10515600" cy="1325563"/>
           </a:xfrm>
         </p:spPr>
         <p:txBody>
-          <a:bodyPr wrap="square" lIns="0" rIns="0" tIns="0" bIns="0" anchor="ctr"/>
-          <a:lstStyle/>
-          <a:p>
-            <a:pPr algn="l"/>
-            <a:r>
-              <a:rPr sz="2300" b="1">
-                <a:solidFill>
-                  <a:srgbClr val="231F20"/>
-                </a:solidFill>
-                <a:latin typeface="Calibri"/>
-              </a:rPr>
-              <a:t>A Raspberry Pi 5 backup passes on </a:t>
-            </a:r>
-            <a:r>
-              <a:rPr sz="2300" b="1">
-                <a:solidFill>
-                  <a:srgbClr val="00A0E0"/>
-                </a:solidFill>
-                <a:latin typeface="Calibri"/>
-              </a:rPr>
-              <a:t>2 cells, not 4</a:t>
-            </a:r>
-            <a:endParaRPr lang="en-IN"/>
+          <a:bodyPr/>
+          <a:lstStyle/>
+          <a:p>
+            <a:r>
+              <a:t>Test a battery before you build it</a:t>
+            </a:r>
           </a:p>
         </p:txBody>
       </p:sp>
@@ -6571,1240 +6759,9 @@
           </a:prstGeom>
         </p:spPr>
       </p:pic>
-      <p:sp>
-        <p:nvSpPr>
-          <p:cNvPr id="8" name="Qualifier"/>
-          <p:cNvSpPr txBox="1"/>
-          <p:nvPr/>
-        </p:nvSpPr>
-        <p:spPr>
-          <a:xfrm>
-            <a:off x="2413000" y="431800"/>
-            <a:ext cx="8788400" cy="165100"/>
-          </a:xfrm>
-          <a:prstGeom prst="rect">
-            <a:avLst/>
-          </a:prstGeom>
-          <a:noFill/>
-        </p:spPr>
-        <p:txBody>
-          <a:bodyPr wrap="square" anchor="t" lIns="0" rIns="0" tIns="0" bIns="0">
-            <a:spAutoFit/>
-          </a:bodyPr>
-          <a:lstStyle/>
-          <a:p>
-            <a:pPr algn="l"/>
-            <a:r>
-              <a:rPr sz="1100" b="0">
-                <a:solidFill>
-                  <a:srgbClr val="56616E"/>
-                </a:solidFill>
-                <a:latin typeface="Calibri"/>
-              </a:rPr>
-              <a:t>VOLT-FORGE lets students and engineers test a battery design before buying parts</a:t>
-            </a:r>
-          </a:p>
-        </p:txBody>
-      </p:sp>
-      <p:cxnSp>
-        <p:nvCxnSpPr>
-          <p:cNvPr id="9" name="Connector 8"/>
-          <p:cNvCxnSpPr/>
-          <p:nvPr/>
-        </p:nvCxnSpPr>
-        <p:spPr>
-          <a:xfrm>
-            <a:off x="2413000" y="622300"/>
-            <a:ext cx="4613854" cy="0"/>
-          </a:xfrm>
-          <a:prstGeom prst="line">
-            <a:avLst/>
-          </a:prstGeom>
-          <a:ln w="15875">
-            <a:solidFill>
-              <a:srgbClr val="00A0E0"/>
-            </a:solidFill>
-          </a:ln>
-        </p:spPr>
-        <p:style>
-          <a:lnRef idx="2">
-            <a:schemeClr val="accent1"/>
-          </a:lnRef>
-          <a:fillRef idx="0">
-            <a:schemeClr val="accent1"/>
-          </a:fillRef>
-          <a:effectRef idx="1">
-            <a:schemeClr val="accent1"/>
-          </a:effectRef>
-          <a:fontRef idx="minor">
-            <a:schemeClr val="tx1"/>
-          </a:fontRef>
-        </p:style>
-      </p:cxnSp>
-      <p:cxnSp>
-        <p:nvCxnSpPr>
-          <p:cNvPr id="10" name="Chain"/>
-          <p:cNvCxnSpPr/>
-          <p:nvPr/>
-        </p:nvCxnSpPr>
-        <p:spPr>
-          <a:xfrm>
-            <a:off x="1320800" y="990600"/>
-            <a:ext cx="9550400" cy="0"/>
-          </a:xfrm>
-          <a:prstGeom prst="line">
-            <a:avLst/>
-          </a:prstGeom>
-          <a:ln w="19050">
-            <a:solidFill>
-              <a:srgbClr val="3880C0"/>
-            </a:solidFill>
-          </a:ln>
-        </p:spPr>
-        <p:style>
-          <a:lnRef idx="2">
-            <a:schemeClr val="accent1"/>
-          </a:lnRef>
-          <a:fillRef idx="0">
-            <a:schemeClr val="accent1"/>
-          </a:fillRef>
-          <a:effectRef idx="1">
-            <a:schemeClr val="accent1"/>
-          </a:effectRef>
-          <a:fontRef idx="minor">
-            <a:schemeClr val="tx1"/>
-          </a:fontRef>
-        </p:style>
-      </p:cxnSp>
-      <p:cxnSp>
-        <p:nvCxnSpPr>
-          <p:cNvPr id="11" name="Connector 10"/>
-          <p:cNvCxnSpPr/>
-          <p:nvPr/>
-        </p:nvCxnSpPr>
-        <p:spPr>
-          <a:xfrm>
-            <a:off x="1320800" y="1270000"/>
-            <a:ext cx="0" cy="88900"/>
-          </a:xfrm>
-          <a:prstGeom prst="line">
-            <a:avLst/>
-          </a:prstGeom>
-          <a:ln w="19050">
-            <a:solidFill>
-              <a:srgbClr val="3880C0"/>
-            </a:solidFill>
-          </a:ln>
-        </p:spPr>
-        <p:style>
-          <a:lnRef idx="2">
-            <a:schemeClr val="accent1"/>
-          </a:lnRef>
-          <a:fillRef idx="0">
-            <a:schemeClr val="accent1"/>
-          </a:fillRef>
-          <a:effectRef idx="1">
-            <a:schemeClr val="accent1"/>
-          </a:effectRef>
-          <a:fontRef idx="minor">
-            <a:schemeClr val="tx1"/>
-          </a:fontRef>
-        </p:style>
-      </p:cxnSp>
-      <p:sp>
-        <p:nvSpPr>
-          <p:cNvPr id="12" name="Node: Define"/>
-          <p:cNvSpPr/>
-          <p:nvPr/>
-        </p:nvSpPr>
-        <p:spPr>
-          <a:xfrm>
-            <a:off x="1041400" y="711200"/>
-            <a:ext cx="558800" cy="558800"/>
-          </a:xfrm>
-          <a:prstGeom prst="ellipse">
-            <a:avLst/>
-          </a:prstGeom>
-          <a:solidFill>
-            <a:srgbClr val="1B5E96"/>
-          </a:solidFill>
-          <a:ln>
-            <a:noFill/>
-          </a:ln>
-          <a:effectLst/>
-        </p:spPr>
-        <p:style>
-          <a:lnRef idx="1">
-            <a:schemeClr val="accent1"/>
-          </a:lnRef>
-          <a:fillRef idx="3">
-            <a:schemeClr val="accent1"/>
-          </a:fillRef>
-          <a:effectRef idx="2">
-            <a:schemeClr val="accent1"/>
-          </a:effectRef>
-          <a:fontRef idx="minor">
-            <a:schemeClr val="lt1"/>
-          </a:fontRef>
-        </p:style>
-        <p:txBody>
-          <a:bodyPr rtlCol="0" anchor="ctr"/>
-          <a:lstStyle/>
-          <a:p>
-            <a:pPr algn="ctr"/>
-          </a:p>
-        </p:txBody>
-      </p:sp>
-      <p:sp>
-        <p:nvSpPr>
-          <p:cNvPr id="13" name="TextBox 12"/>
-          <p:cNvSpPr txBox="1"/>
-          <p:nvPr/>
-        </p:nvSpPr>
-        <p:spPr>
-          <a:xfrm>
-            <a:off x="939800" y="711200"/>
-            <a:ext cx="762000" cy="558800"/>
-          </a:xfrm>
-          <a:prstGeom prst="rect">
-            <a:avLst/>
-          </a:prstGeom>
-          <a:noFill/>
-        </p:spPr>
-        <p:txBody>
-          <a:bodyPr wrap="square" anchor="ctr" lIns="0" rIns="0" tIns="0" bIns="0">
-            <a:spAutoFit/>
-          </a:bodyPr>
-          <a:lstStyle/>
-          <a:p>
-            <a:pPr algn="ctr"/>
-            <a:r>
-              <a:rPr sz="1000" b="1">
-                <a:solidFill>
-                  <a:srgbClr val="FFFFFF"/>
-                </a:solidFill>
-                <a:latin typeface="Calibri"/>
-              </a:rPr>
-              <a:t>Define</a:t>
-            </a:r>
-          </a:p>
-        </p:txBody>
-      </p:sp>
-      <p:sp>
-        <p:nvSpPr>
-          <p:cNvPr id="14" name="Card: Define"/>
-          <p:cNvSpPr/>
-          <p:nvPr/>
-        </p:nvSpPr>
-        <p:spPr>
-          <a:xfrm>
-            <a:off x="177800" y="1358900"/>
-            <a:ext cx="2286000" cy="635000"/>
-          </a:xfrm>
-          <a:prstGeom prst="roundRect">
-            <a:avLst>
-              <a:gd name="adj" fmla="val 10000"/>
-            </a:avLst>
-          </a:prstGeom>
-          <a:noFill/>
-          <a:ln w="9525">
-            <a:solidFill>
-              <a:srgbClr val="1B5E96"/>
-            </a:solidFill>
-          </a:ln>
-          <a:effectLst/>
-        </p:spPr>
-        <p:style>
-          <a:lnRef idx="1">
-            <a:schemeClr val="accent1"/>
-          </a:lnRef>
-          <a:fillRef idx="3">
-            <a:schemeClr val="accent1"/>
-          </a:fillRef>
-          <a:effectRef idx="2">
-            <a:schemeClr val="accent1"/>
-          </a:effectRef>
-          <a:fontRef idx="minor">
-            <a:schemeClr val="lt1"/>
-          </a:fontRef>
-        </p:style>
-        <p:txBody>
-          <a:bodyPr rtlCol="0" anchor="ctr"/>
-          <a:lstStyle/>
-          <a:p>
-            <a:pPr algn="ctr"/>
-          </a:p>
-        </p:txBody>
-      </p:sp>
-      <p:sp>
-        <p:nvSpPr>
-          <p:cNvPr id="15" name="TextBox 14"/>
-          <p:cNvSpPr txBox="1"/>
-          <p:nvPr/>
-        </p:nvSpPr>
-        <p:spPr>
-          <a:xfrm>
-            <a:off x="266700" y="1358900"/>
-            <a:ext cx="2108200" cy="635000"/>
-          </a:xfrm>
-          <a:prstGeom prst="rect">
-            <a:avLst/>
-          </a:prstGeom>
-          <a:noFill/>
-        </p:spPr>
-        <p:txBody>
-          <a:bodyPr wrap="square" anchor="ctr" lIns="0" rIns="0" tIns="0" bIns="0">
-            <a:spAutoFit/>
-          </a:bodyPr>
-          <a:lstStyle/>
-          <a:p>
-            <a:pPr algn="ctr"/>
-            <a:r>
-              <a:rPr sz="1000" b="0">
-                <a:solidFill>
-                  <a:srgbClr val="231F20"/>
-                </a:solidFill>
-                <a:latin typeface="Calibri"/>
-              </a:rPr>
-              <a:t>Keep a Pi 5 gateway alive through a power cut: </a:t>
-            </a:r>
-            <a:r>
-              <a:rPr sz="1000" b="1">
-                <a:solidFill>
-                  <a:srgbClr val="231F20"/>
-                </a:solidFill>
-                <a:latin typeface="Calibri"/>
-              </a:rPr>
-              <a:t>10 minutes</a:t>
-            </a:r>
-            <a:r>
-              <a:rPr sz="1000" b="0">
-                <a:solidFill>
-                  <a:srgbClr val="231F20"/>
-                </a:solidFill>
-                <a:latin typeface="Calibri"/>
-              </a:rPr>
-              <a:t> at </a:t>
-            </a:r>
-            <a:r>
-              <a:rPr sz="1000" b="1">
-                <a:solidFill>
-                  <a:srgbClr val="231F20"/>
-                </a:solidFill>
-                <a:latin typeface="Calibri"/>
-              </a:rPr>
-              <a:t>25 W</a:t>
-            </a:r>
-          </a:p>
-        </p:txBody>
-      </p:sp>
-      <p:cxnSp>
-        <p:nvCxnSpPr>
-          <p:cNvPr id="16" name="Connector 15"/>
-          <p:cNvCxnSpPr/>
-          <p:nvPr/>
-        </p:nvCxnSpPr>
-        <p:spPr>
-          <a:xfrm>
-            <a:off x="3708400" y="1270000"/>
-            <a:ext cx="0" cy="88900"/>
-          </a:xfrm>
-          <a:prstGeom prst="line">
-            <a:avLst/>
-          </a:prstGeom>
-          <a:ln w="19050">
-            <a:solidFill>
-              <a:srgbClr val="3880C0"/>
-            </a:solidFill>
-          </a:ln>
-        </p:spPr>
-        <p:style>
-          <a:lnRef idx="2">
-            <a:schemeClr val="accent1"/>
-          </a:lnRef>
-          <a:fillRef idx="0">
-            <a:schemeClr val="accent1"/>
-          </a:fillRef>
-          <a:effectRef idx="1">
-            <a:schemeClr val="accent1"/>
-          </a:effectRef>
-          <a:fontRef idx="minor">
-            <a:schemeClr val="tx1"/>
-          </a:fontRef>
-        </p:style>
-      </p:cxnSp>
-      <p:sp>
-        <p:nvSpPr>
-          <p:cNvPr id="17" name="Node: Build"/>
-          <p:cNvSpPr/>
-          <p:nvPr/>
-        </p:nvSpPr>
-        <p:spPr>
-          <a:xfrm>
-            <a:off x="3429000" y="711200"/>
-            <a:ext cx="558800" cy="558800"/>
-          </a:xfrm>
-          <a:prstGeom prst="ellipse">
-            <a:avLst/>
-          </a:prstGeom>
-          <a:solidFill>
-            <a:srgbClr val="1B5E96"/>
-          </a:solidFill>
-          <a:ln>
-            <a:noFill/>
-          </a:ln>
-          <a:effectLst/>
-        </p:spPr>
-        <p:style>
-          <a:lnRef idx="1">
-            <a:schemeClr val="accent1"/>
-          </a:lnRef>
-          <a:fillRef idx="3">
-            <a:schemeClr val="accent1"/>
-          </a:fillRef>
-          <a:effectRef idx="2">
-            <a:schemeClr val="accent1"/>
-          </a:effectRef>
-          <a:fontRef idx="minor">
-            <a:schemeClr val="lt1"/>
-          </a:fontRef>
-        </p:style>
-        <p:txBody>
-          <a:bodyPr rtlCol="0" anchor="ctr"/>
-          <a:lstStyle/>
-          <a:p>
-            <a:pPr algn="ctr"/>
-          </a:p>
-        </p:txBody>
-      </p:sp>
-      <p:sp>
-        <p:nvSpPr>
-          <p:cNvPr id="18" name="TextBox 17"/>
-          <p:cNvSpPr txBox="1"/>
-          <p:nvPr/>
-        </p:nvSpPr>
-        <p:spPr>
-          <a:xfrm>
-            <a:off x="3327400" y="711200"/>
-            <a:ext cx="762000" cy="558800"/>
-          </a:xfrm>
-          <a:prstGeom prst="rect">
-            <a:avLst/>
-          </a:prstGeom>
-          <a:noFill/>
-        </p:spPr>
-        <p:txBody>
-          <a:bodyPr wrap="square" anchor="ctr" lIns="0" rIns="0" tIns="0" bIns="0">
-            <a:spAutoFit/>
-          </a:bodyPr>
-          <a:lstStyle/>
-          <a:p>
-            <a:pPr algn="ctr"/>
-            <a:r>
-              <a:rPr sz="1000" b="1">
-                <a:solidFill>
-                  <a:srgbClr val="FFFFFF"/>
-                </a:solidFill>
-                <a:latin typeface="Calibri"/>
-              </a:rPr>
-              <a:t>Build</a:t>
-            </a:r>
-          </a:p>
-        </p:txBody>
-      </p:sp>
-      <p:sp>
-        <p:nvSpPr>
-          <p:cNvPr id="19" name="Card: Build"/>
-          <p:cNvSpPr/>
-          <p:nvPr/>
-        </p:nvSpPr>
-        <p:spPr>
-          <a:xfrm>
-            <a:off x="2565400" y="1358900"/>
-            <a:ext cx="2286000" cy="635000"/>
-          </a:xfrm>
-          <a:prstGeom prst="roundRect">
-            <a:avLst>
-              <a:gd name="adj" fmla="val 10000"/>
-            </a:avLst>
-          </a:prstGeom>
-          <a:noFill/>
-          <a:ln w="9525">
-            <a:solidFill>
-              <a:srgbClr val="1B5E96"/>
-            </a:solidFill>
-          </a:ln>
-          <a:effectLst/>
-        </p:spPr>
-        <p:style>
-          <a:lnRef idx="1">
-            <a:schemeClr val="accent1"/>
-          </a:lnRef>
-          <a:fillRef idx="3">
-            <a:schemeClr val="accent1"/>
-          </a:fillRef>
-          <a:effectRef idx="2">
-            <a:schemeClr val="accent1"/>
-          </a:effectRef>
-          <a:fontRef idx="minor">
-            <a:schemeClr val="lt1"/>
-          </a:fontRef>
-        </p:style>
-        <p:txBody>
-          <a:bodyPr rtlCol="0" anchor="ctr"/>
-          <a:lstStyle/>
-          <a:p>
-            <a:pPr algn="ctr"/>
-          </a:p>
-        </p:txBody>
-      </p:sp>
-      <p:sp>
-        <p:nvSpPr>
-          <p:cNvPr id="20" name="TextBox 19"/>
-          <p:cNvSpPr txBox="1"/>
-          <p:nvPr/>
-        </p:nvSpPr>
-        <p:spPr>
-          <a:xfrm>
-            <a:off x="2654300" y="1358900"/>
-            <a:ext cx="2108200" cy="635000"/>
-          </a:xfrm>
-          <a:prstGeom prst="rect">
-            <a:avLst/>
-          </a:prstGeom>
-          <a:noFill/>
-        </p:spPr>
-        <p:txBody>
-          <a:bodyPr wrap="square" anchor="ctr" lIns="0" rIns="0" tIns="0" bIns="0">
-            <a:spAutoFit/>
-          </a:bodyPr>
-          <a:lstStyle/>
-          <a:p>
-            <a:pPr algn="ctr"/>
-            <a:r>
-              <a:rPr sz="1000" b="1">
-                <a:solidFill>
-                  <a:srgbClr val="231F20"/>
-                </a:solidFill>
-                <a:latin typeface="Calibri"/>
-              </a:rPr>
-              <a:t>Wire real cells</a:t>
-            </a:r>
-            <a:r>
-              <a:rPr sz="1000" b="0">
-                <a:solidFill>
-                  <a:srgbClr val="231F20"/>
-                </a:solidFill>
-                <a:latin typeface="Calibri"/>
-              </a:rPr>
-              <a:t> on a canvas, with the load shown on the design</a:t>
-            </a:r>
-          </a:p>
-        </p:txBody>
-      </p:sp>
-      <p:cxnSp>
-        <p:nvCxnSpPr>
-          <p:cNvPr id="21" name="Connector 20"/>
-          <p:cNvCxnSpPr/>
-          <p:nvPr/>
-        </p:nvCxnSpPr>
-        <p:spPr>
-          <a:xfrm>
-            <a:off x="6096000" y="1270000"/>
-            <a:ext cx="0" cy="88900"/>
-          </a:xfrm>
-          <a:prstGeom prst="line">
-            <a:avLst/>
-          </a:prstGeom>
-          <a:ln w="19050">
-            <a:solidFill>
-              <a:srgbClr val="3880C0"/>
-            </a:solidFill>
-          </a:ln>
-        </p:spPr>
-        <p:style>
-          <a:lnRef idx="2">
-            <a:schemeClr val="accent1"/>
-          </a:lnRef>
-          <a:fillRef idx="0">
-            <a:schemeClr val="accent1"/>
-          </a:fillRef>
-          <a:effectRef idx="1">
-            <a:schemeClr val="accent1"/>
-          </a:effectRef>
-          <a:fontRef idx="minor">
-            <a:schemeClr val="tx1"/>
-          </a:fontRef>
-        </p:style>
-      </p:cxnSp>
-      <p:sp>
-        <p:nvSpPr>
-          <p:cNvPr id="22" name="Node: Test"/>
-          <p:cNvSpPr/>
-          <p:nvPr/>
-        </p:nvSpPr>
-        <p:spPr>
-          <a:xfrm>
-            <a:off x="5816600" y="711200"/>
-            <a:ext cx="558800" cy="558800"/>
-          </a:xfrm>
-          <a:prstGeom prst="ellipse">
-            <a:avLst/>
-          </a:prstGeom>
-          <a:solidFill>
-            <a:srgbClr val="1B5E96"/>
-          </a:solidFill>
-          <a:ln>
-            <a:noFill/>
-          </a:ln>
-          <a:effectLst/>
-        </p:spPr>
-        <p:style>
-          <a:lnRef idx="1">
-            <a:schemeClr val="accent1"/>
-          </a:lnRef>
-          <a:fillRef idx="3">
-            <a:schemeClr val="accent1"/>
-          </a:fillRef>
-          <a:effectRef idx="2">
-            <a:schemeClr val="accent1"/>
-          </a:effectRef>
-          <a:fontRef idx="minor">
-            <a:schemeClr val="lt1"/>
-          </a:fontRef>
-        </p:style>
-        <p:txBody>
-          <a:bodyPr rtlCol="0" anchor="ctr"/>
-          <a:lstStyle/>
-          <a:p>
-            <a:pPr algn="ctr"/>
-          </a:p>
-        </p:txBody>
-      </p:sp>
-      <p:sp>
-        <p:nvSpPr>
-          <p:cNvPr id="23" name="TextBox 22"/>
-          <p:cNvSpPr txBox="1"/>
-          <p:nvPr/>
-        </p:nvSpPr>
-        <p:spPr>
-          <a:xfrm>
-            <a:off x="5715000" y="711200"/>
-            <a:ext cx="762000" cy="558800"/>
-          </a:xfrm>
-          <a:prstGeom prst="rect">
-            <a:avLst/>
-          </a:prstGeom>
-          <a:noFill/>
-        </p:spPr>
-        <p:txBody>
-          <a:bodyPr wrap="square" anchor="ctr" lIns="0" rIns="0" tIns="0" bIns="0">
-            <a:spAutoFit/>
-          </a:bodyPr>
-          <a:lstStyle/>
-          <a:p>
-            <a:pPr algn="ctr"/>
-            <a:r>
-              <a:rPr sz="1000" b="1">
-                <a:solidFill>
-                  <a:srgbClr val="FFFFFF"/>
-                </a:solidFill>
-                <a:latin typeface="Calibri"/>
-              </a:rPr>
-              <a:t>Test</a:t>
-            </a:r>
-          </a:p>
-        </p:txBody>
-      </p:sp>
-      <p:sp>
-        <p:nvSpPr>
-          <p:cNvPr id="24" name="Card: Test"/>
-          <p:cNvSpPr/>
-          <p:nvPr/>
-        </p:nvSpPr>
-        <p:spPr>
-          <a:xfrm>
-            <a:off x="4953000" y="1358900"/>
-            <a:ext cx="2286000" cy="635000"/>
-          </a:xfrm>
-          <a:prstGeom prst="roundRect">
-            <a:avLst>
-              <a:gd name="adj" fmla="val 10000"/>
-            </a:avLst>
-          </a:prstGeom>
-          <a:noFill/>
-          <a:ln w="9525">
-            <a:solidFill>
-              <a:srgbClr val="1B5E96"/>
-            </a:solidFill>
-          </a:ln>
-          <a:effectLst/>
-        </p:spPr>
-        <p:style>
-          <a:lnRef idx="1">
-            <a:schemeClr val="accent1"/>
-          </a:lnRef>
-          <a:fillRef idx="3">
-            <a:schemeClr val="accent1"/>
-          </a:fillRef>
-          <a:effectRef idx="2">
-            <a:schemeClr val="accent1"/>
-          </a:effectRef>
-          <a:fontRef idx="minor">
-            <a:schemeClr val="lt1"/>
-          </a:fontRef>
-        </p:style>
-        <p:txBody>
-          <a:bodyPr rtlCol="0" anchor="ctr"/>
-          <a:lstStyle/>
-          <a:p>
-            <a:pPr algn="ctr"/>
-          </a:p>
-        </p:txBody>
-      </p:sp>
-      <p:sp>
-        <p:nvSpPr>
-          <p:cNvPr id="25" name="TextBox 24"/>
-          <p:cNvSpPr txBox="1"/>
-          <p:nvPr/>
-        </p:nvSpPr>
-        <p:spPr>
-          <a:xfrm>
-            <a:off x="5041900" y="1358900"/>
-            <a:ext cx="2108200" cy="635000"/>
-          </a:xfrm>
-          <a:prstGeom prst="rect">
-            <a:avLst/>
-          </a:prstGeom>
-          <a:noFill/>
-        </p:spPr>
-        <p:txBody>
-          <a:bodyPr wrap="square" anchor="ctr" lIns="0" rIns="0" tIns="0" bIns="0">
-            <a:spAutoFit/>
-          </a:bodyPr>
-          <a:lstStyle/>
-          <a:p>
-            <a:pPr algn="ctr"/>
-            <a:r>
-              <a:rPr sz="1000" b="0">
-                <a:solidFill>
-                  <a:srgbClr val="231F20"/>
-                </a:solidFill>
-                <a:latin typeface="Calibri"/>
-              </a:rPr>
-              <a:t>Circuit and heat solved </a:t>
-            </a:r>
-            <a:r>
-              <a:rPr sz="1000" b="1">
-                <a:solidFill>
-                  <a:srgbClr val="231F20"/>
-                </a:solidFill>
-                <a:latin typeface="Calibri"/>
-              </a:rPr>
-              <a:t>in seconds</a:t>
-            </a:r>
-            <a:r>
-              <a:rPr sz="1000" b="0">
-                <a:solidFill>
-                  <a:srgbClr val="231F20"/>
-                </a:solidFill>
-                <a:latin typeface="Calibri"/>
-              </a:rPr>
-              <a:t>, with cell limits enforced</a:t>
-            </a:r>
-          </a:p>
-        </p:txBody>
-      </p:sp>
-      <p:cxnSp>
-        <p:nvCxnSpPr>
-          <p:cNvPr id="26" name="Connector 25"/>
-          <p:cNvCxnSpPr/>
-          <p:nvPr/>
-        </p:nvCxnSpPr>
-        <p:spPr>
-          <a:xfrm>
-            <a:off x="8483600" y="1270000"/>
-            <a:ext cx="0" cy="88900"/>
-          </a:xfrm>
-          <a:prstGeom prst="line">
-            <a:avLst/>
-          </a:prstGeom>
-          <a:ln w="19050">
-            <a:solidFill>
-              <a:srgbClr val="3880C0"/>
-            </a:solidFill>
-          </a:ln>
-        </p:spPr>
-        <p:style>
-          <a:lnRef idx="2">
-            <a:schemeClr val="accent1"/>
-          </a:lnRef>
-          <a:fillRef idx="0">
-            <a:schemeClr val="accent1"/>
-          </a:fillRef>
-          <a:effectRef idx="1">
-            <a:schemeClr val="accent1"/>
-          </a:effectRef>
-          <a:fontRef idx="minor">
-            <a:schemeClr val="tx1"/>
-          </a:fontRef>
-        </p:style>
-      </p:cxnSp>
-      <p:sp>
-        <p:nvSpPr>
-          <p:cNvPr id="27" name="Node: Improve"/>
-          <p:cNvSpPr/>
-          <p:nvPr/>
-        </p:nvSpPr>
-        <p:spPr>
-          <a:xfrm>
-            <a:off x="8204200" y="711200"/>
-            <a:ext cx="558800" cy="558800"/>
-          </a:xfrm>
-          <a:prstGeom prst="ellipse">
-            <a:avLst/>
-          </a:prstGeom>
-          <a:solidFill>
-            <a:srgbClr val="1B5E96"/>
-          </a:solidFill>
-          <a:ln>
-            <a:noFill/>
-          </a:ln>
-          <a:effectLst/>
-        </p:spPr>
-        <p:style>
-          <a:lnRef idx="1">
-            <a:schemeClr val="accent1"/>
-          </a:lnRef>
-          <a:fillRef idx="3">
-            <a:schemeClr val="accent1"/>
-          </a:fillRef>
-          <a:effectRef idx="2">
-            <a:schemeClr val="accent1"/>
-          </a:effectRef>
-          <a:fontRef idx="minor">
-            <a:schemeClr val="lt1"/>
-          </a:fontRef>
-        </p:style>
-        <p:txBody>
-          <a:bodyPr rtlCol="0" anchor="ctr"/>
-          <a:lstStyle/>
-          <a:p>
-            <a:pPr algn="ctr"/>
-          </a:p>
-        </p:txBody>
-      </p:sp>
-      <p:sp>
-        <p:nvSpPr>
-          <p:cNvPr id="28" name="TextBox 27"/>
-          <p:cNvSpPr txBox="1"/>
-          <p:nvPr/>
-        </p:nvSpPr>
-        <p:spPr>
-          <a:xfrm>
-            <a:off x="8102600" y="711200"/>
-            <a:ext cx="762000" cy="558800"/>
-          </a:xfrm>
-          <a:prstGeom prst="rect">
-            <a:avLst/>
-          </a:prstGeom>
-          <a:noFill/>
-        </p:spPr>
-        <p:txBody>
-          <a:bodyPr wrap="square" anchor="ctr" lIns="0" rIns="0" tIns="0" bIns="0">
-            <a:spAutoFit/>
-          </a:bodyPr>
-          <a:lstStyle/>
-          <a:p>
-            <a:pPr algn="ctr"/>
-            <a:r>
-              <a:rPr sz="1000" b="1">
-                <a:solidFill>
-                  <a:srgbClr val="FFFFFF"/>
-                </a:solidFill>
-                <a:latin typeface="Calibri"/>
-              </a:rPr>
-              <a:t>Improve</a:t>
-            </a:r>
-          </a:p>
-        </p:txBody>
-      </p:sp>
-      <p:sp>
-        <p:nvSpPr>
-          <p:cNvPr id="29" name="Card: Improve"/>
-          <p:cNvSpPr/>
-          <p:nvPr/>
-        </p:nvSpPr>
-        <p:spPr>
-          <a:xfrm>
-            <a:off x="7340600" y="1358900"/>
-            <a:ext cx="2286000" cy="635000"/>
-          </a:xfrm>
-          <a:prstGeom prst="roundRect">
-            <a:avLst>
-              <a:gd name="adj" fmla="val 10000"/>
-            </a:avLst>
-          </a:prstGeom>
-          <a:noFill/>
-          <a:ln w="9525">
-            <a:solidFill>
-              <a:srgbClr val="1B5E96"/>
-            </a:solidFill>
-          </a:ln>
-          <a:effectLst/>
-        </p:spPr>
-        <p:style>
-          <a:lnRef idx="1">
-            <a:schemeClr val="accent1"/>
-          </a:lnRef>
-          <a:fillRef idx="3">
-            <a:schemeClr val="accent1"/>
-          </a:fillRef>
-          <a:effectRef idx="2">
-            <a:schemeClr val="accent1"/>
-          </a:effectRef>
-          <a:fontRef idx="minor">
-            <a:schemeClr val="lt1"/>
-          </a:fontRef>
-        </p:style>
-        <p:txBody>
-          <a:bodyPr rtlCol="0" anchor="ctr"/>
-          <a:lstStyle/>
-          <a:p>
-            <a:pPr algn="ctr"/>
-          </a:p>
-        </p:txBody>
-      </p:sp>
-      <p:sp>
-        <p:nvSpPr>
-          <p:cNvPr id="30" name="TextBox 29"/>
-          <p:cNvSpPr txBox="1"/>
-          <p:nvPr/>
-        </p:nvSpPr>
-        <p:spPr>
-          <a:xfrm>
-            <a:off x="7429500" y="1358900"/>
-            <a:ext cx="2108200" cy="635000"/>
-          </a:xfrm>
-          <a:prstGeom prst="rect">
-            <a:avLst/>
-          </a:prstGeom>
-          <a:noFill/>
-        </p:spPr>
-        <p:txBody>
-          <a:bodyPr wrap="square" anchor="ctr" lIns="0" rIns="0" tIns="0" bIns="0">
-            <a:spAutoFit/>
-          </a:bodyPr>
-          <a:lstStyle/>
-          <a:p>
-            <a:pPr algn="ctr"/>
-            <a:r>
-              <a:rPr sz="1000" b="1">
-                <a:solidFill>
-                  <a:srgbClr val="231F20"/>
-                </a:solidFill>
-                <a:latin typeface="Calibri"/>
-              </a:rPr>
-              <a:t>Find the smallest design</a:t>
-            </a:r>
-            <a:r>
-              <a:rPr sz="1000" b="0">
-                <a:solidFill>
-                  <a:srgbClr val="231F20"/>
-                </a:solidFill>
-                <a:latin typeface="Calibri"/>
-              </a:rPr>
-              <a:t> rebuilds and tests 1 to 4 cells</a:t>
-            </a:r>
-          </a:p>
-        </p:txBody>
-      </p:sp>
-      <p:cxnSp>
-        <p:nvCxnSpPr>
-          <p:cNvPr id="31" name="Connector 30"/>
-          <p:cNvCxnSpPr/>
-          <p:nvPr/>
-        </p:nvCxnSpPr>
-        <p:spPr>
-          <a:xfrm>
-            <a:off x="10871200" y="1270000"/>
-            <a:ext cx="0" cy="88900"/>
-          </a:xfrm>
-          <a:prstGeom prst="line">
-            <a:avLst/>
-          </a:prstGeom>
-          <a:ln w="19050">
-            <a:solidFill>
-              <a:srgbClr val="3880C0"/>
-            </a:solidFill>
-          </a:ln>
-        </p:spPr>
-        <p:style>
-          <a:lnRef idx="2">
-            <a:schemeClr val="accent1"/>
-          </a:lnRef>
-          <a:fillRef idx="0">
-            <a:schemeClr val="accent1"/>
-          </a:fillRef>
-          <a:effectRef idx="1">
-            <a:schemeClr val="accent1"/>
-          </a:effectRef>
-          <a:fontRef idx="minor">
-            <a:schemeClr val="tx1"/>
-          </a:fontRef>
-        </p:style>
-      </p:cxnSp>
-      <p:sp>
-        <p:nvSpPr>
-          <p:cNvPr id="32" name="Node: Decide"/>
-          <p:cNvSpPr/>
-          <p:nvPr/>
-        </p:nvSpPr>
-        <p:spPr>
-          <a:xfrm>
-            <a:off x="10591800" y="711200"/>
-            <a:ext cx="558800" cy="558800"/>
-          </a:xfrm>
-          <a:prstGeom prst="ellipse">
-            <a:avLst/>
-          </a:prstGeom>
-          <a:solidFill>
-            <a:srgbClr val="1B5E96"/>
-          </a:solidFill>
-          <a:ln>
-            <a:noFill/>
-          </a:ln>
-          <a:effectLst/>
-        </p:spPr>
-        <p:style>
-          <a:lnRef idx="1">
-            <a:schemeClr val="accent1"/>
-          </a:lnRef>
-          <a:fillRef idx="3">
-            <a:schemeClr val="accent1"/>
-          </a:fillRef>
-          <a:effectRef idx="2">
-            <a:schemeClr val="accent1"/>
-          </a:effectRef>
-          <a:fontRef idx="minor">
-            <a:schemeClr val="lt1"/>
-          </a:fontRef>
-        </p:style>
-        <p:txBody>
-          <a:bodyPr rtlCol="0" anchor="ctr"/>
-          <a:lstStyle/>
-          <a:p>
-            <a:pPr algn="ctr"/>
-          </a:p>
-        </p:txBody>
-      </p:sp>
-      <p:sp>
-        <p:nvSpPr>
-          <p:cNvPr id="33" name="TextBox 32"/>
-          <p:cNvSpPr txBox="1"/>
-          <p:nvPr/>
-        </p:nvSpPr>
-        <p:spPr>
-          <a:xfrm>
-            <a:off x="10490200" y="711200"/>
-            <a:ext cx="762000" cy="558800"/>
-          </a:xfrm>
-          <a:prstGeom prst="rect">
-            <a:avLst/>
-          </a:prstGeom>
-          <a:noFill/>
-        </p:spPr>
-        <p:txBody>
-          <a:bodyPr wrap="square" anchor="ctr" lIns="0" rIns="0" tIns="0" bIns="0">
-            <a:spAutoFit/>
-          </a:bodyPr>
-          <a:lstStyle/>
-          <a:p>
-            <a:pPr algn="ctr"/>
-            <a:r>
-              <a:rPr sz="1000" b="1">
-                <a:solidFill>
-                  <a:srgbClr val="FFFFFF"/>
-                </a:solidFill>
-                <a:latin typeface="Calibri"/>
-              </a:rPr>
-              <a:t>Decide</a:t>
-            </a:r>
-          </a:p>
-        </p:txBody>
-      </p:sp>
-      <p:sp>
-        <p:nvSpPr>
-          <p:cNvPr id="34" name="Card: Decide"/>
-          <p:cNvSpPr/>
-          <p:nvPr/>
-        </p:nvSpPr>
-        <p:spPr>
-          <a:xfrm>
-            <a:off x="9728200" y="1358900"/>
-            <a:ext cx="2286000" cy="635000"/>
-          </a:xfrm>
-          <a:prstGeom prst="roundRect">
-            <a:avLst>
-              <a:gd name="adj" fmla="val 10000"/>
-            </a:avLst>
-          </a:prstGeom>
-          <a:noFill/>
-          <a:ln w="9525">
-            <a:solidFill>
-              <a:srgbClr val="1B5E96"/>
-            </a:solidFill>
-          </a:ln>
-          <a:effectLst/>
-        </p:spPr>
-        <p:style>
-          <a:lnRef idx="1">
-            <a:schemeClr val="accent1"/>
-          </a:lnRef>
-          <a:fillRef idx="3">
-            <a:schemeClr val="accent1"/>
-          </a:fillRef>
-          <a:effectRef idx="2">
-            <a:schemeClr val="accent1"/>
-          </a:effectRef>
-          <a:fontRef idx="minor">
-            <a:schemeClr val="lt1"/>
-          </a:fontRef>
-        </p:style>
-        <p:txBody>
-          <a:bodyPr rtlCol="0" anchor="ctr"/>
-          <a:lstStyle/>
-          <a:p>
-            <a:pPr algn="ctr"/>
-          </a:p>
-        </p:txBody>
-      </p:sp>
-      <p:sp>
-        <p:nvSpPr>
-          <p:cNvPr id="35" name="TextBox 34"/>
-          <p:cNvSpPr txBox="1"/>
-          <p:nvPr/>
-        </p:nvSpPr>
-        <p:spPr>
-          <a:xfrm>
-            <a:off x="9817100" y="1358900"/>
-            <a:ext cx="2108200" cy="635000"/>
-          </a:xfrm>
-          <a:prstGeom prst="rect">
-            <a:avLst/>
-          </a:prstGeom>
-          <a:noFill/>
-        </p:spPr>
-        <p:txBody>
-          <a:bodyPr wrap="square" anchor="ctr" lIns="0" rIns="0" tIns="0" bIns="0">
-            <a:spAutoFit/>
-          </a:bodyPr>
-          <a:lstStyle/>
-          <a:p>
-            <a:pPr algn="ctr"/>
-            <a:r>
-              <a:rPr sz="1000" b="0">
-                <a:solidFill>
-                  <a:srgbClr val="231F20"/>
-                </a:solidFill>
-                <a:latin typeface="Calibri"/>
-              </a:rPr>
-              <a:t>Compare </a:t>
-            </a:r>
-            <a:r>
-              <a:rPr sz="1000" b="1">
-                <a:solidFill>
-                  <a:srgbClr val="231F20"/>
-                </a:solidFill>
-                <a:latin typeface="Calibri"/>
-              </a:rPr>
-              <a:t>cost, mass and margin</a:t>
-            </a:r>
-            <a:r>
-              <a:rPr sz="1000" b="0">
-                <a:solidFill>
-                  <a:srgbClr val="231F20"/>
-                </a:solidFill>
-                <a:latin typeface="Calibri"/>
-              </a:rPr>
-              <a:t>, then stress the winner</a:t>
-            </a:r>
-          </a:p>
-        </p:txBody>
-      </p:sp>
-      <p:sp>
-        <p:nvSpPr>
-          <p:cNvPr id="36" name="Section: The starting design: Geekworm X1206 V2.0, four 21700 slots"/>
-          <p:cNvSpPr txBox="1"/>
-          <p:nvPr/>
-        </p:nvSpPr>
-        <p:spPr>
-          <a:xfrm>
-            <a:off x="177800" y="2108200"/>
-            <a:ext cx="4318000" cy="165100"/>
-          </a:xfrm>
-          <a:prstGeom prst="rect">
-            <a:avLst/>
-          </a:prstGeom>
-          <a:noFill/>
-        </p:spPr>
-        <p:txBody>
-          <a:bodyPr wrap="square" anchor="t" lIns="0" rIns="0" tIns="0" bIns="0">
-            <a:spAutoFit/>
-          </a:bodyPr>
-          <a:lstStyle/>
-          <a:p>
-            <a:pPr algn="l"/>
-            <a:r>
-              <a:rPr sz="1100" b="1">
-                <a:solidFill>
-                  <a:srgbClr val="231F20"/>
-                </a:solidFill>
-                <a:latin typeface="Calibri"/>
-              </a:rPr>
-              <a:t>The starting design: Geekworm X1206 V2.0, four 21700 slots</a:t>
-            </a:r>
-          </a:p>
-        </p:txBody>
-      </p:sp>
-      <p:cxnSp>
-        <p:nvCxnSpPr>
-          <p:cNvPr id="37" name="Connector 36"/>
-          <p:cNvCxnSpPr/>
-          <p:nvPr/>
-        </p:nvCxnSpPr>
-        <p:spPr>
-          <a:xfrm>
-            <a:off x="177800" y="2286000"/>
-            <a:ext cx="3486017" cy="0"/>
-          </a:xfrm>
-          <a:prstGeom prst="line">
-            <a:avLst/>
-          </a:prstGeom>
-          <a:ln w="12700">
-            <a:solidFill>
-              <a:srgbClr val="00A0E0"/>
-            </a:solidFill>
-          </a:ln>
-        </p:spPr>
-        <p:style>
-          <a:lnRef idx="2">
-            <a:schemeClr val="accent1"/>
-          </a:lnRef>
-          <a:fillRef idx="0">
-            <a:schemeClr val="accent1"/>
-          </a:fillRef>
-          <a:effectRef idx="1">
-            <a:schemeClr val="accent1"/>
-          </a:effectRef>
-          <a:fontRef idx="minor">
-            <a:schemeClr val="tx1"/>
-          </a:fontRef>
-        </p:style>
-      </p:cxnSp>
       <p:pic>
         <p:nvPicPr>
-          <p:cNvPr id="38" name="Product screenshot" descr="slide_canvas_crop.png"/>
+          <p:cNvPr id="8" name="VOLT-FORGE Round 1 slide" descr="VOLT-FORGE: the seven rubric criteria around the working app, with its canvas and test verdict at the centre."/>
           <p:cNvPicPr>
             <a:picLocks noChangeAspect="1"/>
           </p:cNvPicPr>
@@ -7818,2735 +6775,14 @@
         </p:blipFill>
         <p:spPr>
           <a:xfrm>
-            <a:off x="177800" y="2324100"/>
-            <a:ext cx="4318000" cy="1280115"/>
+            <a:off x="0" y="0"/>
+            <a:ext cx="12192000" cy="6858000"/>
           </a:xfrm>
           <a:prstGeom prst="rect">
             <a:avLst/>
           </a:prstGeom>
         </p:spPr>
       </p:pic>
-      <p:sp>
-        <p:nvSpPr>
-          <p:cNvPr id="39" name="Requirement: 25 W"/>
-          <p:cNvSpPr txBox="1"/>
-          <p:nvPr/>
-        </p:nvSpPr>
-        <p:spPr>
-          <a:xfrm>
-            <a:off x="177800" y="3667715"/>
-            <a:ext cx="1439333" cy="152400"/>
-          </a:xfrm>
-          <a:prstGeom prst="rect">
-            <a:avLst/>
-          </a:prstGeom>
-          <a:noFill/>
-        </p:spPr>
-        <p:txBody>
-          <a:bodyPr wrap="square" anchor="t" lIns="0" rIns="0" tIns="0" bIns="0">
-            <a:spAutoFit/>
-          </a:bodyPr>
-          <a:lstStyle/>
-          <a:p>
-            <a:pPr algn="l"/>
-            <a:r>
-              <a:rPr sz="1000" b="1">
-                <a:solidFill>
-                  <a:srgbClr val="231F20"/>
-                </a:solidFill>
-                <a:latin typeface="Calibri"/>
-              </a:rPr>
-              <a:t>25 W </a:t>
-            </a:r>
-            <a:r>
-              <a:rPr sz="1000" b="0">
-                <a:solidFill>
-                  <a:srgbClr val="231F20"/>
-                </a:solidFill>
-                <a:latin typeface="Calibri"/>
-              </a:rPr>
-              <a:t>supply · sourced</a:t>
-            </a:r>
-          </a:p>
-        </p:txBody>
-      </p:sp>
-      <p:sp>
-        <p:nvSpPr>
-          <p:cNvPr id="40" name="Requirement: 90%"/>
-          <p:cNvSpPr txBox="1"/>
-          <p:nvPr/>
-        </p:nvSpPr>
-        <p:spPr>
-          <a:xfrm>
-            <a:off x="1617133" y="3667715"/>
-            <a:ext cx="1439333" cy="152400"/>
-          </a:xfrm>
-          <a:prstGeom prst="rect">
-            <a:avLst/>
-          </a:prstGeom>
-          <a:noFill/>
-        </p:spPr>
-        <p:txBody>
-          <a:bodyPr wrap="square" anchor="t" lIns="0" rIns="0" tIns="0" bIns="0">
-            <a:spAutoFit/>
-          </a:bodyPr>
-          <a:lstStyle/>
-          <a:p>
-            <a:pPr algn="l"/>
-            <a:r>
-              <a:rPr sz="1000" b="1">
-                <a:solidFill>
-                  <a:srgbClr val="231F20"/>
-                </a:solidFill>
-                <a:latin typeface="Calibri"/>
-              </a:rPr>
-              <a:t>90% </a:t>
-            </a:r>
-            <a:r>
-              <a:rPr sz="1000" b="0">
-                <a:solidFill>
-                  <a:srgbClr val="231F20"/>
-                </a:solidFill>
-                <a:latin typeface="Calibri"/>
-              </a:rPr>
-              <a:t>converter · assumed</a:t>
-            </a:r>
-          </a:p>
-        </p:txBody>
-      </p:sp>
-      <p:sp>
-        <p:nvSpPr>
-          <p:cNvPr id="41" name="Requirement: 8.42 A"/>
-          <p:cNvSpPr txBox="1"/>
-          <p:nvPr/>
-        </p:nvSpPr>
-        <p:spPr>
-          <a:xfrm>
-            <a:off x="3056466" y="3667715"/>
-            <a:ext cx="1439333" cy="152400"/>
-          </a:xfrm>
-          <a:prstGeom prst="rect">
-            <a:avLst/>
-          </a:prstGeom>
-          <a:noFill/>
-        </p:spPr>
-        <p:txBody>
-          <a:bodyPr wrap="square" anchor="t" lIns="0" rIns="0" tIns="0" bIns="0">
-            <a:spAutoFit/>
-          </a:bodyPr>
-          <a:lstStyle/>
-          <a:p>
-            <a:pPr algn="l"/>
-            <a:r>
-              <a:rPr sz="1000" b="1">
-                <a:solidFill>
-                  <a:srgbClr val="231F20"/>
-                </a:solidFill>
-                <a:latin typeface="Calibri"/>
-              </a:rPr>
-              <a:t>8.42 A </a:t>
-            </a:r>
-            <a:r>
-              <a:rPr sz="1000" b="0">
-                <a:solidFill>
-                  <a:srgbClr val="231F20"/>
-                </a:solidFill>
-                <a:latin typeface="Calibri"/>
-              </a:rPr>
-              <a:t>· calculated</a:t>
-            </a:r>
-          </a:p>
-        </p:txBody>
-      </p:sp>
-      <p:sp>
-        <p:nvSpPr>
-          <p:cNvPr id="42" name="Requirement: 10 min"/>
-          <p:cNvSpPr txBox="1"/>
-          <p:nvPr/>
-        </p:nvSpPr>
-        <p:spPr>
-          <a:xfrm>
-            <a:off x="177800" y="3832815"/>
-            <a:ext cx="1439333" cy="152400"/>
-          </a:xfrm>
-          <a:prstGeom prst="rect">
-            <a:avLst/>
-          </a:prstGeom>
-          <a:noFill/>
-        </p:spPr>
-        <p:txBody>
-          <a:bodyPr wrap="square" anchor="t" lIns="0" rIns="0" tIns="0" bIns="0">
-            <a:spAutoFit/>
-          </a:bodyPr>
-          <a:lstStyle/>
-          <a:p>
-            <a:pPr algn="l"/>
-            <a:r>
-              <a:rPr sz="1000" b="1">
-                <a:solidFill>
-                  <a:srgbClr val="231F20"/>
-                </a:solidFill>
-                <a:latin typeface="Calibri"/>
-              </a:rPr>
-              <a:t>10 min </a:t>
-            </a:r>
-            <a:r>
-              <a:rPr sz="1000" b="0">
-                <a:solidFill>
-                  <a:srgbClr val="231F20"/>
-                </a:solidFill>
-                <a:latin typeface="Calibri"/>
-              </a:rPr>
-              <a:t>· assumed</a:t>
-            </a:r>
-          </a:p>
-        </p:txBody>
-      </p:sp>
-      <p:sp>
-        <p:nvSpPr>
-          <p:cNvPr id="43" name="Requirement: 3.3 V"/>
-          <p:cNvSpPr txBox="1"/>
-          <p:nvPr/>
-        </p:nvSpPr>
-        <p:spPr>
-          <a:xfrm>
-            <a:off x="1617133" y="3832815"/>
-            <a:ext cx="1439333" cy="152400"/>
-          </a:xfrm>
-          <a:prstGeom prst="rect">
-            <a:avLst/>
-          </a:prstGeom>
-          <a:noFill/>
-        </p:spPr>
-        <p:txBody>
-          <a:bodyPr wrap="square" anchor="t" lIns="0" rIns="0" tIns="0" bIns="0">
-            <a:spAutoFit/>
-          </a:bodyPr>
-          <a:lstStyle/>
-          <a:p>
-            <a:pPr algn="l"/>
-            <a:r>
-              <a:rPr sz="1000" b="1">
-                <a:solidFill>
-                  <a:srgbClr val="231F20"/>
-                </a:solidFill>
-                <a:latin typeface="Calibri"/>
-              </a:rPr>
-              <a:t>3.3 V </a:t>
-            </a:r>
-            <a:r>
-              <a:rPr sz="1000" b="0">
-                <a:solidFill>
-                  <a:srgbClr val="231F20"/>
-                </a:solidFill>
-                <a:latin typeface="Calibri"/>
-              </a:rPr>
-              <a:t>floor · assumed</a:t>
-            </a:r>
-          </a:p>
-        </p:txBody>
-      </p:sp>
-      <p:sp>
-        <p:nvSpPr>
-          <p:cNvPr id="44" name="Requirement: 23 °C"/>
-          <p:cNvSpPr txBox="1"/>
-          <p:nvPr/>
-        </p:nvSpPr>
-        <p:spPr>
-          <a:xfrm>
-            <a:off x="3056466" y="3832815"/>
-            <a:ext cx="1439333" cy="152400"/>
-          </a:xfrm>
-          <a:prstGeom prst="rect">
-            <a:avLst/>
-          </a:prstGeom>
-          <a:noFill/>
-        </p:spPr>
-        <p:txBody>
-          <a:bodyPr wrap="square" anchor="t" lIns="0" rIns="0" tIns="0" bIns="0">
-            <a:spAutoFit/>
-          </a:bodyPr>
-          <a:lstStyle/>
-          <a:p>
-            <a:pPr algn="l"/>
-            <a:r>
-              <a:rPr sz="1000" b="1">
-                <a:solidFill>
-                  <a:srgbClr val="231F20"/>
-                </a:solidFill>
-                <a:latin typeface="Calibri"/>
-              </a:rPr>
-              <a:t>23 °C </a:t>
-            </a:r>
-            <a:r>
-              <a:rPr sz="1000" b="0">
-                <a:solidFill>
-                  <a:srgbClr val="231F20"/>
-                </a:solidFill>
-                <a:latin typeface="Calibri"/>
-              </a:rPr>
-              <a:t>room · assumed</a:t>
-            </a:r>
-          </a:p>
-        </p:txBody>
-      </p:sp>
-      <p:sp>
-        <p:nvSpPr>
-          <p:cNvPr id="45" name="Section: What the tool found, with same-end outputs"/>
-          <p:cNvSpPr txBox="1"/>
-          <p:nvPr/>
-        </p:nvSpPr>
-        <p:spPr>
-          <a:xfrm>
-            <a:off x="4673600" y="2108200"/>
-            <a:ext cx="7340600" cy="165100"/>
-          </a:xfrm>
-          <a:prstGeom prst="rect">
-            <a:avLst/>
-          </a:prstGeom>
-          <a:noFill/>
-        </p:spPr>
-        <p:txBody>
-          <a:bodyPr wrap="square" anchor="t" lIns="0" rIns="0" tIns="0" bIns="0">
-            <a:spAutoFit/>
-          </a:bodyPr>
-          <a:lstStyle/>
-          <a:p>
-            <a:pPr algn="l"/>
-            <a:r>
-              <a:rPr sz="1100" b="1">
-                <a:solidFill>
-                  <a:srgbClr val="231F20"/>
-                </a:solidFill>
-                <a:latin typeface="Calibri"/>
-              </a:rPr>
-              <a:t>What the tool found, with same-end outputs</a:t>
-            </a:r>
-          </a:p>
-        </p:txBody>
-      </p:sp>
-      <p:cxnSp>
-        <p:nvCxnSpPr>
-          <p:cNvPr id="46" name="Connector 45"/>
-          <p:cNvCxnSpPr/>
-          <p:nvPr/>
-        </p:nvCxnSpPr>
-        <p:spPr>
-          <a:xfrm>
-            <a:off x="4673600" y="2286000"/>
-            <a:ext cx="2596651" cy="0"/>
-          </a:xfrm>
-          <a:prstGeom prst="line">
-            <a:avLst/>
-          </a:prstGeom>
-          <a:ln w="12700">
-            <a:solidFill>
-              <a:srgbClr val="00A0E0"/>
-            </a:solidFill>
-          </a:ln>
-        </p:spPr>
-        <p:style>
-          <a:lnRef idx="2">
-            <a:schemeClr val="accent1"/>
-          </a:lnRef>
-          <a:fillRef idx="0">
-            <a:schemeClr val="accent1"/>
-          </a:fillRef>
-          <a:effectRef idx="1">
-            <a:schemeClr val="accent1"/>
-          </a:effectRef>
-          <a:fontRef idx="minor">
-            <a:schemeClr val="tx1"/>
-          </a:fontRef>
-        </p:style>
-      </p:cxnSp>
-      <p:sp>
-        <p:nvSpPr>
-          <p:cNvPr id="47" name="Stat: 2 cells"/>
-          <p:cNvSpPr txBox="1"/>
-          <p:nvPr/>
-        </p:nvSpPr>
-        <p:spPr>
-          <a:xfrm>
-            <a:off x="4673600" y="2324100"/>
-            <a:ext cx="1758950" cy="355600"/>
-          </a:xfrm>
-          <a:prstGeom prst="rect">
-            <a:avLst/>
-          </a:prstGeom>
-          <a:noFill/>
-        </p:spPr>
-        <p:txBody>
-          <a:bodyPr wrap="square" anchor="t" lIns="0" rIns="0" tIns="0" bIns="0">
-            <a:spAutoFit/>
-          </a:bodyPr>
-          <a:lstStyle/>
-          <a:p>
-            <a:pPr algn="l"/>
-            <a:r>
-              <a:rPr sz="2300" b="1">
-                <a:solidFill>
-                  <a:srgbClr val="1B5E96"/>
-                </a:solidFill>
-                <a:latin typeface="Calibri"/>
-              </a:rPr>
-              <a:t>2 cells</a:t>
-            </a:r>
-          </a:p>
-        </p:txBody>
-      </p:sp>
-      <p:sp>
-        <p:nvSpPr>
-          <p:cNvPr id="48" name="TextBox 47"/>
-          <p:cNvSpPr txBox="1"/>
-          <p:nvPr/>
-        </p:nvSpPr>
-        <p:spPr>
-          <a:xfrm>
-            <a:off x="4673600" y="2679700"/>
-            <a:ext cx="1784350" cy="152400"/>
-          </a:xfrm>
-          <a:prstGeom prst="rect">
-            <a:avLst/>
-          </a:prstGeom>
-          <a:noFill/>
-        </p:spPr>
-        <p:txBody>
-          <a:bodyPr wrap="square" anchor="t" lIns="0" rIns="0" tIns="0" bIns="0">
-            <a:spAutoFit/>
-          </a:bodyPr>
-          <a:lstStyle/>
-          <a:p>
-            <a:pPr algn="l"/>
-            <a:r>
-              <a:rPr sz="1000" b="0">
-                <a:solidFill>
-                  <a:srgbClr val="56616E"/>
-                </a:solidFill>
-                <a:latin typeface="Calibri"/>
-              </a:rPr>
-              <a:t>smallest qualifying, from 4</a:t>
-            </a:r>
-          </a:p>
-        </p:txBody>
-      </p:sp>
-      <p:sp>
-        <p:nvSpPr>
-          <p:cNvPr id="49" name="Stat: ₹2,412"/>
-          <p:cNvSpPr txBox="1"/>
-          <p:nvPr/>
-        </p:nvSpPr>
-        <p:spPr>
-          <a:xfrm>
-            <a:off x="6508750" y="2324100"/>
-            <a:ext cx="1758950" cy="355600"/>
-          </a:xfrm>
-          <a:prstGeom prst="rect">
-            <a:avLst/>
-          </a:prstGeom>
-          <a:noFill/>
-        </p:spPr>
-        <p:txBody>
-          <a:bodyPr wrap="square" anchor="t" lIns="0" rIns="0" tIns="0" bIns="0">
-            <a:spAutoFit/>
-          </a:bodyPr>
-          <a:lstStyle/>
-          <a:p>
-            <a:pPr algn="l"/>
-            <a:r>
-              <a:rPr sz="2300" b="1">
-                <a:solidFill>
-                  <a:srgbClr val="1B5E96"/>
-                </a:solidFill>
-                <a:latin typeface="Calibri"/>
-              </a:rPr>
-              <a:t>₹2,412</a:t>
-            </a:r>
-          </a:p>
-        </p:txBody>
-      </p:sp>
-      <p:sp>
-        <p:nvSpPr>
-          <p:cNvPr id="50" name="TextBox 49"/>
-          <p:cNvSpPr txBox="1"/>
-          <p:nvPr/>
-        </p:nvSpPr>
-        <p:spPr>
-          <a:xfrm>
-            <a:off x="6508750" y="2679700"/>
-            <a:ext cx="1784350" cy="152400"/>
-          </a:xfrm>
-          <a:prstGeom prst="rect">
-            <a:avLst/>
-          </a:prstGeom>
-          <a:noFill/>
-        </p:spPr>
-        <p:txBody>
-          <a:bodyPr wrap="square" anchor="t" lIns="0" rIns="0" tIns="0" bIns="0">
-            <a:spAutoFit/>
-          </a:bodyPr>
-          <a:lstStyle/>
-          <a:p>
-            <a:pPr algn="l"/>
-            <a:r>
-              <a:rPr sz="1000" b="0">
-                <a:solidFill>
-                  <a:srgbClr val="56616E"/>
-                </a:solidFill>
-                <a:latin typeface="Calibri"/>
-              </a:rPr>
-              <a:t>less on cells, ₹4,824 to ₹2,412</a:t>
-            </a:r>
-          </a:p>
-        </p:txBody>
-      </p:sp>
-      <p:sp>
-        <p:nvSpPr>
-          <p:cNvPr id="51" name="Stat: 140 g"/>
-          <p:cNvSpPr txBox="1"/>
-          <p:nvPr/>
-        </p:nvSpPr>
-        <p:spPr>
-          <a:xfrm>
-            <a:off x="8343900" y="2324100"/>
-            <a:ext cx="1758950" cy="355600"/>
-          </a:xfrm>
-          <a:prstGeom prst="rect">
-            <a:avLst/>
-          </a:prstGeom>
-          <a:noFill/>
-        </p:spPr>
-        <p:txBody>
-          <a:bodyPr wrap="square" anchor="t" lIns="0" rIns="0" tIns="0" bIns="0">
-            <a:spAutoFit/>
-          </a:bodyPr>
-          <a:lstStyle/>
-          <a:p>
-            <a:pPr algn="l"/>
-            <a:r>
-              <a:rPr sz="2300" b="1">
-                <a:solidFill>
-                  <a:srgbClr val="1B5E96"/>
-                </a:solidFill>
-                <a:latin typeface="Calibri"/>
-              </a:rPr>
-              <a:t>140 g</a:t>
-            </a:r>
-          </a:p>
-        </p:txBody>
-      </p:sp>
-      <p:sp>
-        <p:nvSpPr>
-          <p:cNvPr id="52" name="TextBox 51"/>
-          <p:cNvSpPr txBox="1"/>
-          <p:nvPr/>
-        </p:nvSpPr>
-        <p:spPr>
-          <a:xfrm>
-            <a:off x="8343900" y="2679700"/>
-            <a:ext cx="1784350" cy="152400"/>
-          </a:xfrm>
-          <a:prstGeom prst="rect">
-            <a:avLst/>
-          </a:prstGeom>
-          <a:noFill/>
-        </p:spPr>
-        <p:txBody>
-          <a:bodyPr wrap="square" anchor="t" lIns="0" rIns="0" tIns="0" bIns="0">
-            <a:spAutoFit/>
-          </a:bodyPr>
-          <a:lstStyle/>
-          <a:p>
-            <a:pPr algn="l"/>
-            <a:r>
-              <a:rPr sz="1000" b="0">
-                <a:solidFill>
-                  <a:srgbClr val="56616E"/>
-                </a:solidFill>
-                <a:latin typeface="Calibri"/>
-              </a:rPr>
-              <a:t>less cell mass, 280 to 140 g</a:t>
-            </a:r>
-          </a:p>
-        </p:txBody>
-      </p:sp>
-      <p:sp>
-        <p:nvSpPr>
-          <p:cNvPr id="53" name="Stat: 33 of 33"/>
-          <p:cNvSpPr txBox="1"/>
-          <p:nvPr/>
-        </p:nvSpPr>
-        <p:spPr>
-          <a:xfrm>
-            <a:off x="10179050" y="2324100"/>
-            <a:ext cx="1758950" cy="355600"/>
-          </a:xfrm>
-          <a:prstGeom prst="rect">
-            <a:avLst/>
-          </a:prstGeom>
-          <a:noFill/>
-        </p:spPr>
-        <p:txBody>
-          <a:bodyPr wrap="square" anchor="t" lIns="0" rIns="0" tIns="0" bIns="0">
-            <a:spAutoFit/>
-          </a:bodyPr>
-          <a:lstStyle/>
-          <a:p>
-            <a:pPr algn="l"/>
-            <a:r>
-              <a:rPr sz="2300" b="1">
-                <a:solidFill>
-                  <a:srgbClr val="1B5E96"/>
-                </a:solidFill>
-                <a:latin typeface="Calibri"/>
-              </a:rPr>
-              <a:t>33 of 33</a:t>
-            </a:r>
-          </a:p>
-        </p:txBody>
-      </p:sp>
-      <p:sp>
-        <p:nvSpPr>
-          <p:cNvPr id="54" name="TextBox 53"/>
-          <p:cNvSpPr txBox="1"/>
-          <p:nvPr/>
-        </p:nvSpPr>
-        <p:spPr>
-          <a:xfrm>
-            <a:off x="10179050" y="2679700"/>
-            <a:ext cx="1784350" cy="152400"/>
-          </a:xfrm>
-          <a:prstGeom prst="rect">
-            <a:avLst/>
-          </a:prstGeom>
-          <a:noFill/>
-        </p:spPr>
-        <p:txBody>
-          <a:bodyPr wrap="square" anchor="t" lIns="0" rIns="0" tIns="0" bIns="0">
-            <a:spAutoFit/>
-          </a:bodyPr>
-          <a:lstStyle/>
-          <a:p>
-            <a:pPr algn="l"/>
-            <a:r>
-              <a:rPr sz="1000" b="0">
-                <a:solidFill>
-                  <a:srgbClr val="56616E"/>
-                </a:solidFill>
-                <a:latin typeface="Calibri"/>
-              </a:rPr>
-              <a:t>required Pi cases passed</a:t>
-            </a:r>
-          </a:p>
-        </p:txBody>
-      </p:sp>
-      <p:graphicFrame>
-        <p:nvGraphicFramePr>
-          <p:cNvPr id="55" name="Trade-offs"/>
-          <p:cNvGraphicFramePr>
-            <a:graphicFrameLocks noGrp="1"/>
-          </p:cNvGraphicFramePr>
-          <p:nvPr/>
-        </p:nvGraphicFramePr>
-        <p:xfrm>
-          <a:off x="4673600" y="2882900"/>
-          <a:ext cx="7340598" cy="1047750"/>
-        </p:xfrm>
-        <a:graphic>
-          <a:graphicData uri="http://schemas.openxmlformats.org/drawingml/2006/table">
-            <a:tbl>
-              <a:tblPr firstRow="0" bandRow="0">
-                <a:tableStyleId>{2D5ABB26-0587-4C30-8999-92F81FD0307C}</a:tableStyleId>
-              </a:tblPr>
-              <a:tblGrid>
-                <a:gridCol w="513841"/>
-                <a:gridCol w="880872"/>
-                <a:gridCol w="734060"/>
-                <a:gridCol w="880872"/>
-                <a:gridCol w="734060"/>
-                <a:gridCol w="954278"/>
-                <a:gridCol w="1027683"/>
-                <a:gridCol w="807466"/>
-                <a:gridCol w="807466"/>
-              </a:tblGrid>
-              <a:tr h="209550">
-                <a:tc>
-                  <a:txBody>
-                    <a:bodyPr/>
-                    <a:lstStyle/>
-                    <a:p>
-                      <a:pPr algn="ctr"/>
-                      <a:r>
-                        <a:rPr sz="1000" b="1">
-                          <a:solidFill>
-                            <a:srgbClr val="FFFFFF"/>
-                          </a:solidFill>
-                          <a:latin typeface="Calibri"/>
-                        </a:rPr>
-                        <a:t>Cells</a:t>
-                      </a:r>
-                    </a:p>
-                  </a:txBody>
-                  <a:tcPr marL="31750" marR="31750" marT="15240" marB="15240" anchor="ctr">
-                    <a:solidFill>
-                      <a:srgbClr val="3880C0"/>
-                    </a:solidFill>
-                  </a:tcPr>
-                </a:tc>
-                <a:tc>
-                  <a:txBody>
-                    <a:bodyPr/>
-                    <a:lstStyle/>
-                    <a:p>
-                      <a:pPr algn="ctr"/>
-                      <a:r>
-                        <a:rPr sz="1000" b="1">
-                          <a:solidFill>
-                            <a:srgbClr val="FFFFFF"/>
-                          </a:solidFill>
-                          <a:latin typeface="Calibri"/>
-                        </a:rPr>
-                        <a:t>Verdict</a:t>
-                      </a:r>
-                    </a:p>
-                  </a:txBody>
-                  <a:tcPr marL="31750" marR="31750" marT="15240" marB="15240" anchor="ctr">
-                    <a:solidFill>
-                      <a:srgbClr val="3880C0"/>
-                    </a:solidFill>
-                  </a:tcPr>
-                </a:tc>
-                <a:tc>
-                  <a:txBody>
-                    <a:bodyPr/>
-                    <a:lstStyle/>
-                    <a:p>
-                      <a:pPr algn="ctr"/>
-                      <a:r>
-                        <a:rPr sz="1000" b="1">
-                          <a:solidFill>
-                            <a:srgbClr val="FFFFFF"/>
-                          </a:solidFill>
-                          <a:latin typeface="Calibri"/>
-                        </a:rPr>
-                        <a:t>Lowest V</a:t>
-                      </a:r>
-                    </a:p>
-                  </a:txBody>
-                  <a:tcPr marL="31750" marR="31750" marT="15240" marB="15240" anchor="ctr">
-                    <a:solidFill>
-                      <a:srgbClr val="3880C0"/>
-                    </a:solidFill>
-                  </a:tcPr>
-                </a:tc>
-                <a:tc>
-                  <a:txBody>
-                    <a:bodyPr/>
-                    <a:lstStyle/>
-                    <a:p>
-                      <a:pPr algn="ctr"/>
-                      <a:r>
-                        <a:rPr sz="1000" b="1">
-                          <a:solidFill>
-                            <a:srgbClr val="FFFFFF"/>
-                          </a:solidFill>
-                          <a:latin typeface="Calibri"/>
-                        </a:rPr>
-                        <a:t>Peak cell A</a:t>
-                      </a:r>
-                    </a:p>
-                  </a:txBody>
-                  <a:tcPr marL="31750" marR="31750" marT="15240" marB="15240" anchor="ctr">
-                    <a:solidFill>
-                      <a:srgbClr val="3880C0"/>
-                    </a:solidFill>
-                  </a:tcPr>
-                </a:tc>
-                <a:tc>
-                  <a:txBody>
-                    <a:bodyPr/>
-                    <a:lstStyle/>
-                    <a:p>
-                      <a:pPr algn="ctr"/>
-                      <a:r>
-                        <a:rPr sz="1000" b="1">
-                          <a:solidFill>
-                            <a:srgbClr val="FFFFFF"/>
-                          </a:solidFill>
-                          <a:latin typeface="Calibri"/>
-                        </a:rPr>
-                        <a:t>Warmest</a:t>
-                      </a:r>
-                    </a:p>
-                  </a:txBody>
-                  <a:tcPr marL="31750" marR="31750" marT="15240" marB="15240" anchor="ctr">
-                    <a:solidFill>
-                      <a:srgbClr val="3880C0"/>
-                    </a:solidFill>
-                  </a:tcPr>
-                </a:tc>
-                <a:tc>
-                  <a:txBody>
-                    <a:bodyPr/>
-                    <a:lstStyle/>
-                    <a:p>
-                      <a:pPr algn="ctr"/>
-                      <a:r>
-                        <a:rPr sz="1000" b="1">
-                          <a:solidFill>
-                            <a:srgbClr val="FFFFFF"/>
-                          </a:solidFill>
-                          <a:latin typeface="Calibri"/>
-                        </a:rPr>
-                        <a:t>Worst-case A</a:t>
-                      </a:r>
-                    </a:p>
-                  </a:txBody>
-                  <a:tcPr marL="31750" marR="31750" marT="15240" marB="15240" anchor="ctr">
-                    <a:solidFill>
-                      <a:srgbClr val="3880C0"/>
-                    </a:solidFill>
-                  </a:tcPr>
-                </a:tc>
-                <a:tc>
-                  <a:txBody>
-                    <a:bodyPr/>
-                    <a:lstStyle/>
-                    <a:p>
-                      <a:pPr algn="ctr"/>
-                      <a:r>
-                        <a:rPr sz="1000" b="1">
-                          <a:solidFill>
-                            <a:srgbClr val="FFFFFF"/>
-                          </a:solidFill>
-                          <a:latin typeface="Calibri"/>
-                        </a:rPr>
-                        <a:t>Worst-case °C</a:t>
-                      </a:r>
-                    </a:p>
-                  </a:txBody>
-                  <a:tcPr marL="31750" marR="31750" marT="15240" marB="15240" anchor="ctr">
-                    <a:solidFill>
-                      <a:srgbClr val="3880C0"/>
-                    </a:solidFill>
-                  </a:tcPr>
-                </a:tc>
-                <a:tc>
-                  <a:txBody>
-                    <a:bodyPr/>
-                    <a:lstStyle/>
-                    <a:p>
-                      <a:pPr algn="ctr"/>
-                      <a:r>
-                        <a:rPr sz="1000" b="1">
-                          <a:solidFill>
-                            <a:srgbClr val="FFFFFF"/>
-                          </a:solidFill>
-                          <a:latin typeface="Calibri"/>
-                        </a:rPr>
-                        <a:t>Cell cost</a:t>
-                      </a:r>
-                    </a:p>
-                  </a:txBody>
-                  <a:tcPr marL="31750" marR="31750" marT="15240" marB="15240" anchor="ctr">
-                    <a:solidFill>
-                      <a:srgbClr val="3880C0"/>
-                    </a:solidFill>
-                  </a:tcPr>
-                </a:tc>
-                <a:tc>
-                  <a:txBody>
-                    <a:bodyPr/>
-                    <a:lstStyle/>
-                    <a:p>
-                      <a:pPr algn="ctr"/>
-                      <a:r>
-                        <a:rPr sz="1000" b="1">
-                          <a:solidFill>
-                            <a:srgbClr val="FFFFFF"/>
-                          </a:solidFill>
-                          <a:latin typeface="Calibri"/>
-                        </a:rPr>
-                        <a:t>Cell mass</a:t>
-                      </a:r>
-                    </a:p>
-                  </a:txBody>
-                  <a:tcPr marL="31750" marR="31750" marT="15240" marB="15240" anchor="ctr">
-                    <a:solidFill>
-                      <a:srgbClr val="3880C0"/>
-                    </a:solidFill>
-                  </a:tcPr>
-                </a:tc>
-              </a:tr>
-              <a:tr h="209550">
-                <a:tc>
-                  <a:txBody>
-                    <a:bodyPr/>
-                    <a:lstStyle/>
-                    <a:p>
-                      <a:pPr algn="ctr"/>
-                      <a:r>
-                        <a:rPr sz="1000" b="0">
-                          <a:solidFill>
-                            <a:srgbClr val="231F20"/>
-                          </a:solidFill>
-                          <a:latin typeface="Calibri"/>
-                        </a:rPr>
-                        <a:t>1</a:t>
-                      </a:r>
-                    </a:p>
-                  </a:txBody>
-                  <a:tcPr marL="31750" marR="31750" marT="15240" marB="15240" anchor="ctr">
-                    <a:noFill/>
-                  </a:tcPr>
-                </a:tc>
-                <a:tc>
-                  <a:txBody>
-                    <a:bodyPr/>
-                    <a:lstStyle/>
-                    <a:p>
-                      <a:pPr algn="ctr"/>
-                      <a:r>
-                        <a:rPr sz="1000" b="1">
-                          <a:solidFill>
-                            <a:srgbClr val="D9480F"/>
-                          </a:solidFill>
-                          <a:latin typeface="Calibri"/>
-                        </a:rPr>
-                        <a:t>Refused</a:t>
-                      </a:r>
-                    </a:p>
-                  </a:txBody>
-                  <a:tcPr marL="31750" marR="31750" marT="15240" marB="15240" anchor="ctr">
-                    <a:noFill/>
-                  </a:tcPr>
-                </a:tc>
-                <a:tc>
-                  <a:txBody>
-                    <a:bodyPr/>
-                    <a:lstStyle/>
-                    <a:p>
-                      <a:pPr algn="ctr"/>
-                      <a:r>
-                        <a:rPr sz="1000" b="0">
-                          <a:solidFill>
-                            <a:srgbClr val="231F20"/>
-                          </a:solidFill>
-                          <a:latin typeface="Calibri"/>
-                        </a:rPr>
-                        <a:t>—</a:t>
-                      </a:r>
-                    </a:p>
-                  </a:txBody>
-                  <a:tcPr marL="31750" marR="31750" marT="15240" marB="15240" anchor="ctr">
-                    <a:noFill/>
-                  </a:tcPr>
-                </a:tc>
-                <a:tc>
-                  <a:txBody>
-                    <a:bodyPr/>
-                    <a:lstStyle/>
-                    <a:p>
-                      <a:pPr algn="ctr"/>
-                      <a:r>
-                        <a:rPr sz="1000" b="0">
-                          <a:solidFill>
-                            <a:srgbClr val="231F20"/>
-                          </a:solidFill>
-                          <a:latin typeface="Calibri"/>
-                        </a:rPr>
-                        <a:t>—</a:t>
-                      </a:r>
-                    </a:p>
-                  </a:txBody>
-                  <a:tcPr marL="31750" marR="31750" marT="15240" marB="15240" anchor="ctr">
-                    <a:noFill/>
-                  </a:tcPr>
-                </a:tc>
-                <a:tc>
-                  <a:txBody>
-                    <a:bodyPr/>
-                    <a:lstStyle/>
-                    <a:p>
-                      <a:pPr algn="ctr"/>
-                      <a:r>
-                        <a:rPr sz="1000" b="0">
-                          <a:solidFill>
-                            <a:srgbClr val="231F20"/>
-                          </a:solidFill>
-                          <a:latin typeface="Calibri"/>
-                        </a:rPr>
-                        <a:t>—</a:t>
-                      </a:r>
-                    </a:p>
-                  </a:txBody>
-                  <a:tcPr marL="31750" marR="31750" marT="15240" marB="15240" anchor="ctr">
-                    <a:noFill/>
-                  </a:tcPr>
-                </a:tc>
-                <a:tc>
-                  <a:txBody>
-                    <a:bodyPr/>
-                    <a:lstStyle/>
-                    <a:p>
-                      <a:pPr algn="ctr"/>
-                      <a:r>
-                        <a:rPr sz="1000" b="0">
-                          <a:solidFill>
-                            <a:srgbClr val="231F20"/>
-                          </a:solidFill>
-                          <a:latin typeface="Calibri"/>
-                        </a:rPr>
-                        <a:t>—</a:t>
-                      </a:r>
-                    </a:p>
-                  </a:txBody>
-                  <a:tcPr marL="31750" marR="31750" marT="15240" marB="15240" anchor="ctr">
-                    <a:noFill/>
-                  </a:tcPr>
-                </a:tc>
-                <a:tc>
-                  <a:txBody>
-                    <a:bodyPr/>
-                    <a:lstStyle/>
-                    <a:p>
-                      <a:pPr algn="ctr"/>
-                      <a:r>
-                        <a:rPr sz="1000" b="0">
-                          <a:solidFill>
-                            <a:srgbClr val="231F20"/>
-                          </a:solidFill>
-                          <a:latin typeface="Calibri"/>
-                        </a:rPr>
-                        <a:t>—</a:t>
-                      </a:r>
-                    </a:p>
-                  </a:txBody>
-                  <a:tcPr marL="31750" marR="31750" marT="15240" marB="15240" anchor="ctr">
-                    <a:noFill/>
-                  </a:tcPr>
-                </a:tc>
-                <a:tc>
-                  <a:txBody>
-                    <a:bodyPr/>
-                    <a:lstStyle/>
-                    <a:p>
-                      <a:pPr algn="ctr"/>
-                      <a:r>
-                        <a:rPr sz="1000" b="0">
-                          <a:solidFill>
-                            <a:srgbClr val="231F20"/>
-                          </a:solidFill>
-                          <a:latin typeface="Calibri"/>
-                        </a:rPr>
-                        <a:t>₹1,206</a:t>
-                      </a:r>
-                    </a:p>
-                  </a:txBody>
-                  <a:tcPr marL="31750" marR="31750" marT="15240" marB="15240" anchor="ctr">
-                    <a:noFill/>
-                  </a:tcPr>
-                </a:tc>
-                <a:tc>
-                  <a:txBody>
-                    <a:bodyPr/>
-                    <a:lstStyle/>
-                    <a:p>
-                      <a:pPr algn="ctr"/>
-                      <a:r>
-                        <a:rPr sz="1000" b="0">
-                          <a:solidFill>
-                            <a:srgbClr val="231F20"/>
-                          </a:solidFill>
-                          <a:latin typeface="Calibri"/>
-                        </a:rPr>
-                        <a:t>70 g</a:t>
-                      </a:r>
-                    </a:p>
-                  </a:txBody>
-                  <a:tcPr marL="31750" marR="31750" marT="15240" marB="15240" anchor="ctr">
-                    <a:noFill/>
-                  </a:tcPr>
-                </a:tc>
-              </a:tr>
-              <a:tr h="209550">
-                <a:tc>
-                  <a:txBody>
-                    <a:bodyPr/>
-                    <a:lstStyle/>
-                    <a:p>
-                      <a:pPr algn="ctr"/>
-                      <a:r>
-                        <a:rPr sz="1000" b="1">
-                          <a:solidFill>
-                            <a:srgbClr val="231F20"/>
-                          </a:solidFill>
-                          <a:latin typeface="Calibri"/>
-                        </a:rPr>
-                        <a:t>2</a:t>
-                      </a:r>
-                    </a:p>
-                  </a:txBody>
-                  <a:tcPr marL="31750" marR="31750" marT="15240" marB="15240" anchor="ctr">
-                    <a:solidFill>
-                      <a:srgbClr val="EAF4FB"/>
-                    </a:solidFill>
-                  </a:tcPr>
-                </a:tc>
-                <a:tc>
-                  <a:txBody>
-                    <a:bodyPr/>
-                    <a:lstStyle/>
-                    <a:p>
-                      <a:pPr algn="ctr"/>
-                      <a:r>
-                        <a:rPr sz="1000" b="1">
-                          <a:solidFill>
-                            <a:srgbClr val="1B5E96"/>
-                          </a:solidFill>
-                          <a:latin typeface="Calibri"/>
-                        </a:rPr>
-                        <a:t>Qualifies</a:t>
-                      </a:r>
-                    </a:p>
-                  </a:txBody>
-                  <a:tcPr marL="31750" marR="31750" marT="15240" marB="15240" anchor="ctr">
-                    <a:solidFill>
-                      <a:srgbClr val="EAF4FB"/>
-                    </a:solidFill>
-                  </a:tcPr>
-                </a:tc>
-                <a:tc>
-                  <a:txBody>
-                    <a:bodyPr/>
-                    <a:lstStyle/>
-                    <a:p>
-                      <a:pPr algn="ctr"/>
-                      <a:r>
-                        <a:rPr sz="1000" b="1">
-                          <a:solidFill>
-                            <a:srgbClr val="231F20"/>
-                          </a:solidFill>
-                          <a:latin typeface="Calibri"/>
-                        </a:rPr>
-                        <a:t>3.53</a:t>
-                      </a:r>
-                    </a:p>
-                  </a:txBody>
-                  <a:tcPr marL="31750" marR="31750" marT="15240" marB="15240" anchor="ctr">
-                    <a:solidFill>
-                      <a:srgbClr val="EAF4FB"/>
-                    </a:solidFill>
-                  </a:tcPr>
-                </a:tc>
-                <a:tc>
-                  <a:txBody>
-                    <a:bodyPr/>
-                    <a:lstStyle/>
-                    <a:p>
-                      <a:pPr algn="ctr"/>
-                      <a:r>
-                        <a:rPr sz="1000" b="1">
-                          <a:solidFill>
-                            <a:srgbClr val="231F20"/>
-                          </a:solidFill>
-                          <a:latin typeface="Calibri"/>
-                        </a:rPr>
-                        <a:t>4.37</a:t>
-                      </a:r>
-                    </a:p>
-                  </a:txBody>
-                  <a:tcPr marL="31750" marR="31750" marT="15240" marB="15240" anchor="ctr">
-                    <a:solidFill>
-                      <a:srgbClr val="EAF4FB"/>
-                    </a:solidFill>
-                  </a:tcPr>
-                </a:tc>
-                <a:tc>
-                  <a:txBody>
-                    <a:bodyPr/>
-                    <a:lstStyle/>
-                    <a:p>
-                      <a:pPr algn="ctr"/>
-                      <a:r>
-                        <a:rPr sz="1000" b="1">
-                          <a:solidFill>
-                            <a:srgbClr val="231F20"/>
-                          </a:solidFill>
-                          <a:latin typeface="Calibri"/>
-                        </a:rPr>
-                        <a:t>27.5</a:t>
-                      </a:r>
-                    </a:p>
-                  </a:txBody>
-                  <a:tcPr marL="31750" marR="31750" marT="15240" marB="15240" anchor="ctr">
-                    <a:solidFill>
-                      <a:srgbClr val="EAF4FB"/>
-                    </a:solidFill>
-                  </a:tcPr>
-                </a:tc>
-                <a:tc>
-                  <a:txBody>
-                    <a:bodyPr/>
-                    <a:lstStyle/>
-                    <a:p>
-                      <a:pPr algn="ctr"/>
-                      <a:r>
-                        <a:rPr sz="1000" b="1">
-                          <a:solidFill>
-                            <a:srgbClr val="231F20"/>
-                          </a:solidFill>
-                          <a:latin typeface="Calibri"/>
-                        </a:rPr>
-                        <a:t>5.49</a:t>
-                      </a:r>
-                    </a:p>
-                  </a:txBody>
-                  <a:tcPr marL="31750" marR="31750" marT="15240" marB="15240" anchor="ctr">
-                    <a:solidFill>
-                      <a:srgbClr val="EAF4FB"/>
-                    </a:solidFill>
-                  </a:tcPr>
-                </a:tc>
-                <a:tc>
-                  <a:txBody>
-                    <a:bodyPr/>
-                    <a:lstStyle/>
-                    <a:p>
-                      <a:pPr algn="ctr"/>
-                      <a:r>
-                        <a:rPr sz="1000" b="1">
-                          <a:solidFill>
-                            <a:srgbClr val="231F20"/>
-                          </a:solidFill>
-                          <a:latin typeface="Calibri"/>
-                        </a:rPr>
-                        <a:t>31.8</a:t>
-                      </a:r>
-                    </a:p>
-                  </a:txBody>
-                  <a:tcPr marL="31750" marR="31750" marT="15240" marB="15240" anchor="ctr">
-                    <a:solidFill>
-                      <a:srgbClr val="EAF4FB"/>
-                    </a:solidFill>
-                  </a:tcPr>
-                </a:tc>
-                <a:tc>
-                  <a:txBody>
-                    <a:bodyPr/>
-                    <a:lstStyle/>
-                    <a:p>
-                      <a:pPr algn="ctr"/>
-                      <a:r>
-                        <a:rPr sz="1000" b="1">
-                          <a:solidFill>
-                            <a:srgbClr val="231F20"/>
-                          </a:solidFill>
-                          <a:latin typeface="Calibri"/>
-                        </a:rPr>
-                        <a:t>₹2,412</a:t>
-                      </a:r>
-                    </a:p>
-                  </a:txBody>
-                  <a:tcPr marL="31750" marR="31750" marT="15240" marB="15240" anchor="ctr">
-                    <a:solidFill>
-                      <a:srgbClr val="EAF4FB"/>
-                    </a:solidFill>
-                  </a:tcPr>
-                </a:tc>
-                <a:tc>
-                  <a:txBody>
-                    <a:bodyPr/>
-                    <a:lstStyle/>
-                    <a:p>
-                      <a:pPr algn="ctr"/>
-                      <a:r>
-                        <a:rPr sz="1000" b="1">
-                          <a:solidFill>
-                            <a:srgbClr val="231F20"/>
-                          </a:solidFill>
-                          <a:latin typeface="Calibri"/>
-                        </a:rPr>
-                        <a:t>140 g</a:t>
-                      </a:r>
-                    </a:p>
-                  </a:txBody>
-                  <a:tcPr marL="31750" marR="31750" marT="15240" marB="15240" anchor="ctr">
-                    <a:solidFill>
-                      <a:srgbClr val="EAF4FB"/>
-                    </a:solidFill>
-                  </a:tcPr>
-                </a:tc>
-              </a:tr>
-              <a:tr h="209550">
-                <a:tc>
-                  <a:txBody>
-                    <a:bodyPr/>
-                    <a:lstStyle/>
-                    <a:p>
-                      <a:pPr algn="ctr"/>
-                      <a:r>
-                        <a:rPr sz="1000" b="0">
-                          <a:solidFill>
-                            <a:srgbClr val="231F20"/>
-                          </a:solidFill>
-                          <a:latin typeface="Calibri"/>
-                        </a:rPr>
-                        <a:t>3</a:t>
-                      </a:r>
-                    </a:p>
-                  </a:txBody>
-                  <a:tcPr marL="31750" marR="31750" marT="15240" marB="15240" anchor="ctr">
-                    <a:noFill/>
-                  </a:tcPr>
-                </a:tc>
-                <a:tc>
-                  <a:txBody>
-                    <a:bodyPr/>
-                    <a:lstStyle/>
-                    <a:p>
-                      <a:pPr algn="ctr"/>
-                      <a:r>
-                        <a:rPr sz="1000" b="1">
-                          <a:solidFill>
-                            <a:srgbClr val="1B5E96"/>
-                          </a:solidFill>
-                          <a:latin typeface="Calibri"/>
-                        </a:rPr>
-                        <a:t>Qualifies</a:t>
-                      </a:r>
-                    </a:p>
-                  </a:txBody>
-                  <a:tcPr marL="31750" marR="31750" marT="15240" marB="15240" anchor="ctr">
-                    <a:noFill/>
-                  </a:tcPr>
-                </a:tc>
-                <a:tc>
-                  <a:txBody>
-                    <a:bodyPr/>
-                    <a:lstStyle/>
-                    <a:p>
-                      <a:pPr algn="ctr"/>
-                      <a:r>
-                        <a:rPr sz="1000" b="0">
-                          <a:solidFill>
-                            <a:srgbClr val="231F20"/>
-                          </a:solidFill>
-                          <a:latin typeface="Calibri"/>
-                        </a:rPr>
-                        <a:t>3.63</a:t>
-                      </a:r>
-                    </a:p>
-                  </a:txBody>
-                  <a:tcPr marL="31750" marR="31750" marT="15240" marB="15240" anchor="ctr">
-                    <a:noFill/>
-                  </a:tcPr>
-                </a:tc>
-                <a:tc>
-                  <a:txBody>
-                    <a:bodyPr/>
-                    <a:lstStyle/>
-                    <a:p>
-                      <a:pPr algn="ctr"/>
-                      <a:r>
-                        <a:rPr sz="1000" b="0">
-                          <a:solidFill>
-                            <a:srgbClr val="231F20"/>
-                          </a:solidFill>
-                          <a:latin typeface="Calibri"/>
-                        </a:rPr>
-                        <a:t>3.16</a:t>
-                      </a:r>
-                    </a:p>
-                  </a:txBody>
-                  <a:tcPr marL="31750" marR="31750" marT="15240" marB="15240" anchor="ctr">
-                    <a:noFill/>
-                  </a:tcPr>
-                </a:tc>
-                <a:tc>
-                  <a:txBody>
-                    <a:bodyPr/>
-                    <a:lstStyle/>
-                    <a:p>
-                      <a:pPr algn="ctr"/>
-                      <a:r>
-                        <a:rPr sz="1000" b="0">
-                          <a:solidFill>
-                            <a:srgbClr val="231F20"/>
-                          </a:solidFill>
-                          <a:latin typeface="Calibri"/>
-                        </a:rPr>
-                        <a:t>25.4</a:t>
-                      </a:r>
-                    </a:p>
-                  </a:txBody>
-                  <a:tcPr marL="31750" marR="31750" marT="15240" marB="15240" anchor="ctr">
-                    <a:noFill/>
-                  </a:tcPr>
-                </a:tc>
-                <a:tc>
-                  <a:txBody>
-                    <a:bodyPr/>
-                    <a:lstStyle/>
-                    <a:p>
-                      <a:pPr algn="ctr"/>
-                      <a:r>
-                        <a:rPr sz="1000" b="0">
-                          <a:solidFill>
-                            <a:srgbClr val="231F20"/>
-                          </a:solidFill>
-                          <a:latin typeface="Calibri"/>
-                        </a:rPr>
-                        <a:t>3.86</a:t>
-                      </a:r>
-                    </a:p>
-                  </a:txBody>
-                  <a:tcPr marL="31750" marR="31750" marT="15240" marB="15240" anchor="ctr">
-                    <a:noFill/>
-                  </a:tcPr>
-                </a:tc>
-                <a:tc>
-                  <a:txBody>
-                    <a:bodyPr/>
-                    <a:lstStyle/>
-                    <a:p>
-                      <a:pPr algn="ctr"/>
-                      <a:r>
-                        <a:rPr sz="1000" b="0">
-                          <a:solidFill>
-                            <a:srgbClr val="231F20"/>
-                          </a:solidFill>
-                          <a:latin typeface="Calibri"/>
-                        </a:rPr>
-                        <a:t>27.7</a:t>
-                      </a:r>
-                    </a:p>
-                  </a:txBody>
-                  <a:tcPr marL="31750" marR="31750" marT="15240" marB="15240" anchor="ctr">
-                    <a:noFill/>
-                  </a:tcPr>
-                </a:tc>
-                <a:tc>
-                  <a:txBody>
-                    <a:bodyPr/>
-                    <a:lstStyle/>
-                    <a:p>
-                      <a:pPr algn="ctr"/>
-                      <a:r>
-                        <a:rPr sz="1000" b="0">
-                          <a:solidFill>
-                            <a:srgbClr val="231F20"/>
-                          </a:solidFill>
-                          <a:latin typeface="Calibri"/>
-                        </a:rPr>
-                        <a:t>₹3,618</a:t>
-                      </a:r>
-                    </a:p>
-                  </a:txBody>
-                  <a:tcPr marL="31750" marR="31750" marT="15240" marB="15240" anchor="ctr">
-                    <a:noFill/>
-                  </a:tcPr>
-                </a:tc>
-                <a:tc>
-                  <a:txBody>
-                    <a:bodyPr/>
-                    <a:lstStyle/>
-                    <a:p>
-                      <a:pPr algn="ctr"/>
-                      <a:r>
-                        <a:rPr sz="1000" b="0">
-                          <a:solidFill>
-                            <a:srgbClr val="231F20"/>
-                          </a:solidFill>
-                          <a:latin typeface="Calibri"/>
-                        </a:rPr>
-                        <a:t>210 g</a:t>
-                      </a:r>
-                    </a:p>
-                  </a:txBody>
-                  <a:tcPr marL="31750" marR="31750" marT="15240" marB="15240" anchor="ctr">
-                    <a:noFill/>
-                  </a:tcPr>
-                </a:tc>
-              </a:tr>
-              <a:tr h="209550">
-                <a:tc>
-                  <a:txBody>
-                    <a:bodyPr/>
-                    <a:lstStyle/>
-                    <a:p>
-                      <a:pPr algn="ctr"/>
-                      <a:r>
-                        <a:rPr sz="1000" b="0">
-                          <a:solidFill>
-                            <a:srgbClr val="231F20"/>
-                          </a:solidFill>
-                          <a:latin typeface="Calibri"/>
-                        </a:rPr>
-                        <a:t>4</a:t>
-                      </a:r>
-                    </a:p>
-                  </a:txBody>
-                  <a:tcPr marL="31750" marR="31750" marT="15240" marB="15240" anchor="ctr">
-                    <a:noFill/>
-                  </a:tcPr>
-                </a:tc>
-                <a:tc>
-                  <a:txBody>
-                    <a:bodyPr/>
-                    <a:lstStyle/>
-                    <a:p>
-                      <a:pPr algn="ctr"/>
-                      <a:r>
-                        <a:rPr sz="1000" b="1">
-                          <a:solidFill>
-                            <a:srgbClr val="1B5E96"/>
-                          </a:solidFill>
-                          <a:latin typeface="Calibri"/>
-                        </a:rPr>
-                        <a:t>Qualifies</a:t>
-                      </a:r>
-                    </a:p>
-                  </a:txBody>
-                  <a:tcPr marL="31750" marR="31750" marT="15240" marB="15240" anchor="ctr">
-                    <a:noFill/>
-                  </a:tcPr>
-                </a:tc>
-                <a:tc>
-                  <a:txBody>
-                    <a:bodyPr/>
-                    <a:lstStyle/>
-                    <a:p>
-                      <a:pPr algn="ctr"/>
-                      <a:r>
-                        <a:rPr sz="1000" b="0">
-                          <a:solidFill>
-                            <a:srgbClr val="231F20"/>
-                          </a:solidFill>
-                          <a:latin typeface="Calibri"/>
-                        </a:rPr>
-                        <a:t>3.69</a:t>
-                      </a:r>
-                    </a:p>
-                  </a:txBody>
-                  <a:tcPr marL="31750" marR="31750" marT="15240" marB="15240" anchor="ctr">
-                    <a:noFill/>
-                  </a:tcPr>
-                </a:tc>
-                <a:tc>
-                  <a:txBody>
-                    <a:bodyPr/>
-                    <a:lstStyle/>
-                    <a:p>
-                      <a:pPr algn="ctr"/>
-                      <a:r>
-                        <a:rPr sz="1000" b="0">
-                          <a:solidFill>
-                            <a:srgbClr val="231F20"/>
-                          </a:solidFill>
-                          <a:latin typeface="Calibri"/>
-                        </a:rPr>
-                        <a:t>2.64</a:t>
-                      </a:r>
-                    </a:p>
-                  </a:txBody>
-                  <a:tcPr marL="31750" marR="31750" marT="15240" marB="15240" anchor="ctr">
-                    <a:noFill/>
-                  </a:tcPr>
-                </a:tc>
-                <a:tc>
-                  <a:txBody>
-                    <a:bodyPr/>
-                    <a:lstStyle/>
-                    <a:p>
-                      <a:pPr algn="ctr"/>
-                      <a:r>
-                        <a:rPr sz="1000" b="0">
-                          <a:solidFill>
-                            <a:srgbClr val="231F20"/>
-                          </a:solidFill>
-                          <a:latin typeface="Calibri"/>
-                        </a:rPr>
-                        <a:t>24.6</a:t>
-                      </a:r>
-                    </a:p>
-                  </a:txBody>
-                  <a:tcPr marL="31750" marR="31750" marT="15240" marB="15240" anchor="ctr">
-                    <a:noFill/>
-                  </a:tcPr>
-                </a:tc>
-                <a:tc>
-                  <a:txBody>
-                    <a:bodyPr/>
-                    <a:lstStyle/>
-                    <a:p>
-                      <a:pPr algn="ctr"/>
-                      <a:r>
-                        <a:rPr sz="1000" b="0">
-                          <a:solidFill>
-                            <a:srgbClr val="231F20"/>
-                          </a:solidFill>
-                          <a:latin typeface="Calibri"/>
-                        </a:rPr>
-                        <a:t>3.34</a:t>
-                      </a:r>
-                    </a:p>
-                  </a:txBody>
-                  <a:tcPr marL="31750" marR="31750" marT="15240" marB="15240" anchor="ctr">
-                    <a:noFill/>
-                  </a:tcPr>
-                </a:tc>
-                <a:tc>
-                  <a:txBody>
-                    <a:bodyPr/>
-                    <a:lstStyle/>
-                    <a:p>
-                      <a:pPr algn="ctr"/>
-                      <a:r>
-                        <a:rPr sz="1000" b="0">
-                          <a:solidFill>
-                            <a:srgbClr val="231F20"/>
-                          </a:solidFill>
-                          <a:latin typeface="Calibri"/>
-                        </a:rPr>
-                        <a:t>26.1</a:t>
-                      </a:r>
-                    </a:p>
-                  </a:txBody>
-                  <a:tcPr marL="31750" marR="31750" marT="15240" marB="15240" anchor="ctr">
-                    <a:noFill/>
-                  </a:tcPr>
-                </a:tc>
-                <a:tc>
-                  <a:txBody>
-                    <a:bodyPr/>
-                    <a:lstStyle/>
-                    <a:p>
-                      <a:pPr algn="ctr"/>
-                      <a:r>
-                        <a:rPr sz="1000" b="0">
-                          <a:solidFill>
-                            <a:srgbClr val="231F20"/>
-                          </a:solidFill>
-                          <a:latin typeface="Calibri"/>
-                        </a:rPr>
-                        <a:t>₹4,824</a:t>
-                      </a:r>
-                    </a:p>
-                  </a:txBody>
-                  <a:tcPr marL="31750" marR="31750" marT="15240" marB="15240" anchor="ctr">
-                    <a:noFill/>
-                  </a:tcPr>
-                </a:tc>
-                <a:tc>
-                  <a:txBody>
-                    <a:bodyPr/>
-                    <a:lstStyle/>
-                    <a:p>
-                      <a:pPr algn="ctr"/>
-                      <a:r>
-                        <a:rPr sz="1000" b="0">
-                          <a:solidFill>
-                            <a:srgbClr val="231F20"/>
-                          </a:solidFill>
-                          <a:latin typeface="Calibri"/>
-                        </a:rPr>
-                        <a:t>280 g</a:t>
-                      </a:r>
-                    </a:p>
-                  </a:txBody>
-                  <a:tcPr marL="31750" marR="31750" marT="15240" marB="15240" anchor="ctr">
-                    <a:noFill/>
-                  </a:tcPr>
-                </a:tc>
-              </a:tr>
-            </a:tbl>
-          </a:graphicData>
-        </a:graphic>
-      </p:graphicFrame>
-      <p:sp>
-        <p:nvSpPr>
-          <p:cNvPr id="56" name="Section: How far to trust it"/>
-          <p:cNvSpPr txBox="1"/>
-          <p:nvPr/>
-        </p:nvSpPr>
-        <p:spPr>
-          <a:xfrm>
-            <a:off x="177800" y="4083050"/>
-            <a:ext cx="3826933" cy="165100"/>
-          </a:xfrm>
-          <a:prstGeom prst="rect">
-            <a:avLst/>
-          </a:prstGeom>
-          <a:noFill/>
-        </p:spPr>
-        <p:txBody>
-          <a:bodyPr wrap="square" anchor="t" lIns="0" rIns="0" tIns="0" bIns="0">
-            <a:spAutoFit/>
-          </a:bodyPr>
-          <a:lstStyle/>
-          <a:p>
-            <a:pPr algn="l"/>
-            <a:r>
-              <a:rPr sz="1100" b="1">
-                <a:solidFill>
-                  <a:srgbClr val="231F20"/>
-                </a:solidFill>
-                <a:latin typeface="Calibri"/>
-              </a:rPr>
-              <a:t>How far to trust it</a:t>
-            </a:r>
-          </a:p>
-        </p:txBody>
-      </p:sp>
-      <p:cxnSp>
-        <p:nvCxnSpPr>
-          <p:cNvPr id="57" name="Connector 56"/>
-          <p:cNvCxnSpPr/>
-          <p:nvPr/>
-        </p:nvCxnSpPr>
-        <p:spPr>
-          <a:xfrm>
-            <a:off x="177800" y="4260850"/>
-            <a:ext cx="1034587" cy="0"/>
-          </a:xfrm>
-          <a:prstGeom prst="line">
-            <a:avLst/>
-          </a:prstGeom>
-          <a:ln w="12700">
-            <a:solidFill>
-              <a:srgbClr val="00A0E0"/>
-            </a:solidFill>
-          </a:ln>
-        </p:spPr>
-        <p:style>
-          <a:lnRef idx="2">
-            <a:schemeClr val="accent1"/>
-          </a:lnRef>
-          <a:fillRef idx="0">
-            <a:schemeClr val="accent1"/>
-          </a:fillRef>
-          <a:effectRef idx="1">
-            <a:schemeClr val="accent1"/>
-          </a:effectRef>
-          <a:fontRef idx="minor">
-            <a:schemeClr val="tx1"/>
-          </a:fontRef>
-        </p:style>
-      </p:cxnSp>
-      <p:graphicFrame>
-        <p:nvGraphicFramePr>
-          <p:cNvPr id="58" name="Peak temperature rise in K, measured and simulated"/>
-          <p:cNvGraphicFramePr>
-            <a:graphicFrameLocks noGrp="1"/>
-          </p:cNvGraphicFramePr>
-          <p:nvPr/>
-        </p:nvGraphicFramePr>
-        <p:xfrm>
-          <a:off x="139700" y="4298950"/>
-          <a:ext cx="2372698" cy="1346200"/>
-        </p:xfrm>
-        <a:graphic>
-          <a:graphicData uri="http://schemas.openxmlformats.org/drawingml/2006/chart">
-            <c:chart xmlns:c="http://schemas.openxmlformats.org/drawingml/2006/chart" r:id="rId5"/>
-          </a:graphicData>
-        </a:graphic>
-      </p:graphicFrame>
-      <p:sp>
-        <p:nvSpPr>
-          <p:cNvPr id="59" name="Verification"/>
-          <p:cNvSpPr txBox="1"/>
-          <p:nvPr/>
-        </p:nvSpPr>
-        <p:spPr>
-          <a:xfrm>
-            <a:off x="2575898" y="4324350"/>
-            <a:ext cx="1428834" cy="1320800"/>
-          </a:xfrm>
-          <a:prstGeom prst="rect">
-            <a:avLst/>
-          </a:prstGeom>
-          <a:noFill/>
-        </p:spPr>
-        <p:txBody>
-          <a:bodyPr wrap="square" anchor="t" lIns="0" rIns="0" tIns="0" bIns="0">
-            <a:spAutoFit/>
-          </a:bodyPr>
-          <a:lstStyle/>
-          <a:p>
-            <a:pPr algn="l">
-              <a:spcAft>
-                <a:spcPts val="200"/>
-              </a:spcAft>
-            </a:pPr>
-            <a:r>
-              <a:rPr sz="1000" b="1">
-                <a:solidFill>
-                  <a:srgbClr val="231F20"/>
-                </a:solidFill>
-                <a:latin typeface="Calibri"/>
-              </a:rPr>
-              <a:t>Peak rise in K. </a:t>
-            </a:r>
-            <a:r>
-              <a:rPr sz="1000" b="0">
-                <a:solidFill>
-                  <a:srgbClr val="231F20"/>
-                </a:solidFill>
-                <a:latin typeface="Calibri"/>
-              </a:rPr>
-              <a:t>All 12 pre-set real-data cases </a:t>
-            </a:r>
-            <a:r>
-              <a:rPr sz="1000" b="1">
-                <a:solidFill>
-                  <a:srgbClr val="231F20"/>
-                </a:solidFill>
-                <a:latin typeface="Calibri"/>
-              </a:rPr>
-              <a:t>missed their bands</a:t>
-            </a:r>
-            <a:r>
-              <a:rPr sz="1000" b="0">
-                <a:solidFill>
-                  <a:srgbClr val="231F20"/>
-                </a:solidFill>
-                <a:latin typeface="Calibri"/>
-              </a:rPr>
-              <a:t>, so temperatures are a range.</a:t>
-            </a:r>
-          </a:p>
-          <a:p>
-            <a:pPr algn="l">
-              <a:spcAft>
-                <a:spcPts val="200"/>
-              </a:spcAft>
-            </a:pPr>
-            <a:r>
-              <a:rPr sz="1000" b="1">
-                <a:solidFill>
-                  <a:srgbClr val="231F20"/>
-                </a:solidFill>
-                <a:latin typeface="Calibri"/>
-              </a:rPr>
-              <a:t>PyBaMM 15 of 15</a:t>
-            </a:r>
-            <a:r>
-              <a:rPr sz="1000" b="0">
-                <a:solidFill>
-                  <a:srgbClr val="231F20"/>
-                </a:solidFill>
-                <a:latin typeface="Calibri"/>
-              </a:rPr>
-              <a:t> on voltage and heat. Energy balance closes.</a:t>
-            </a:r>
-          </a:p>
-        </p:txBody>
-      </p:sp>
-      <p:sp>
-        <p:nvSpPr>
-          <p:cNvPr id="60" name="Section: Who it is for, and what it is worth"/>
-          <p:cNvSpPr txBox="1"/>
-          <p:nvPr/>
-        </p:nvSpPr>
-        <p:spPr>
-          <a:xfrm>
-            <a:off x="4182533" y="4083050"/>
-            <a:ext cx="3826933" cy="165100"/>
-          </a:xfrm>
-          <a:prstGeom prst="rect">
-            <a:avLst/>
-          </a:prstGeom>
-          <a:noFill/>
-        </p:spPr>
-        <p:txBody>
-          <a:bodyPr wrap="square" anchor="t" lIns="0" rIns="0" tIns="0" bIns="0">
-            <a:spAutoFit/>
-          </a:bodyPr>
-          <a:lstStyle/>
-          <a:p>
-            <a:pPr algn="l"/>
-            <a:r>
-              <a:rPr sz="1100" b="1">
-                <a:solidFill>
-                  <a:srgbClr val="231F20"/>
-                </a:solidFill>
-                <a:latin typeface="Calibri"/>
-              </a:rPr>
-              <a:t>Who it is for, and what it is worth</a:t>
-            </a:r>
-          </a:p>
-        </p:txBody>
-      </p:sp>
-      <p:cxnSp>
-        <p:nvCxnSpPr>
-          <p:cNvPr id="61" name="Connector 60"/>
-          <p:cNvCxnSpPr/>
-          <p:nvPr/>
-        </p:nvCxnSpPr>
-        <p:spPr>
-          <a:xfrm>
-            <a:off x="4182533" y="4260850"/>
-            <a:ext cx="1932706" cy="0"/>
-          </a:xfrm>
-          <a:prstGeom prst="line">
-            <a:avLst/>
-          </a:prstGeom>
-          <a:ln w="12700">
-            <a:solidFill>
-              <a:srgbClr val="00A0E0"/>
-            </a:solidFill>
-          </a:ln>
-        </p:spPr>
-        <p:style>
-          <a:lnRef idx="2">
-            <a:schemeClr val="accent1"/>
-          </a:lnRef>
-          <a:fillRef idx="0">
-            <a:schemeClr val="accent1"/>
-          </a:fillRef>
-          <a:effectRef idx="1">
-            <a:schemeClr val="accent1"/>
-          </a:effectRef>
-          <a:fontRef idx="minor">
-            <a:schemeClr val="tx1"/>
-          </a:fontRef>
-        </p:style>
-      </p:cxnSp>
-      <p:sp>
-        <p:nvSpPr>
-          <p:cNvPr id="62" name="Label: TAM"/>
-          <p:cNvSpPr/>
-          <p:nvPr/>
-        </p:nvSpPr>
-        <p:spPr>
-          <a:xfrm>
-            <a:off x="4182533" y="4337050"/>
-            <a:ext cx="431800" cy="215900"/>
-          </a:xfrm>
-          <a:prstGeom prst="roundRect">
-            <a:avLst>
-              <a:gd name="adj" fmla="val 30000"/>
-            </a:avLst>
-          </a:prstGeom>
-          <a:solidFill>
-            <a:srgbClr val="1B5E96"/>
-          </a:solidFill>
-          <a:ln>
-            <a:noFill/>
-          </a:ln>
-          <a:effectLst/>
-        </p:spPr>
-        <p:style>
-          <a:lnRef idx="1">
-            <a:schemeClr val="accent1"/>
-          </a:lnRef>
-          <a:fillRef idx="3">
-            <a:schemeClr val="accent1"/>
-          </a:fillRef>
-          <a:effectRef idx="2">
-            <a:schemeClr val="accent1"/>
-          </a:effectRef>
-          <a:fontRef idx="minor">
-            <a:schemeClr val="lt1"/>
-          </a:fontRef>
-        </p:style>
-        <p:txBody>
-          <a:bodyPr rtlCol="0" anchor="ctr"/>
-          <a:lstStyle/>
-          <a:p>
-            <a:pPr algn="ctr"/>
-          </a:p>
-        </p:txBody>
-      </p:sp>
-      <p:sp>
-        <p:nvSpPr>
-          <p:cNvPr id="63" name="TextBox 62"/>
-          <p:cNvSpPr txBox="1"/>
-          <p:nvPr/>
-        </p:nvSpPr>
-        <p:spPr>
-          <a:xfrm>
-            <a:off x="4182533" y="4337050"/>
-            <a:ext cx="431800" cy="215900"/>
-          </a:xfrm>
-          <a:prstGeom prst="rect">
-            <a:avLst/>
-          </a:prstGeom>
-          <a:noFill/>
-        </p:spPr>
-        <p:txBody>
-          <a:bodyPr wrap="square" anchor="ctr" lIns="0" rIns="0" tIns="0" bIns="0">
-            <a:spAutoFit/>
-          </a:bodyPr>
-          <a:lstStyle/>
-          <a:p>
-            <a:pPr algn="ctr"/>
-            <a:r>
-              <a:rPr sz="1000" b="1">
-                <a:solidFill>
-                  <a:srgbClr val="FFFFFF"/>
-                </a:solidFill>
-                <a:latin typeface="Calibri"/>
-              </a:rPr>
-              <a:t>TAM</a:t>
-            </a:r>
-          </a:p>
-        </p:txBody>
-      </p:sp>
-      <p:sp>
-        <p:nvSpPr>
-          <p:cNvPr id="64" name="TextBox 63"/>
-          <p:cNvSpPr txBox="1"/>
-          <p:nvPr/>
-        </p:nvSpPr>
-        <p:spPr>
-          <a:xfrm>
-            <a:off x="4690533" y="4337050"/>
-            <a:ext cx="939800" cy="215900"/>
-          </a:xfrm>
-          <a:prstGeom prst="rect">
-            <a:avLst/>
-          </a:prstGeom>
-          <a:noFill/>
-        </p:spPr>
-        <p:txBody>
-          <a:bodyPr wrap="square" anchor="ctr" lIns="0" rIns="0" tIns="0" bIns="0">
-            <a:spAutoFit/>
-          </a:bodyPr>
-          <a:lstStyle/>
-          <a:p>
-            <a:pPr algn="l"/>
-            <a:r>
-              <a:rPr sz="1000" b="1">
-                <a:solidFill>
-                  <a:srgbClr val="231F20"/>
-                </a:solidFill>
-                <a:latin typeface="Calibri"/>
-              </a:rPr>
-              <a:t>41.3 lakh</a:t>
-            </a:r>
-          </a:p>
-        </p:txBody>
-      </p:sp>
-      <p:sp>
-        <p:nvSpPr>
-          <p:cNvPr id="65" name="TextBox 64"/>
-          <p:cNvSpPr txBox="1"/>
-          <p:nvPr/>
-        </p:nvSpPr>
-        <p:spPr>
-          <a:xfrm>
-            <a:off x="5604933" y="4337050"/>
-            <a:ext cx="2404533" cy="215900"/>
-          </a:xfrm>
-          <a:prstGeom prst="rect">
-            <a:avLst/>
-          </a:prstGeom>
-          <a:noFill/>
-        </p:spPr>
-        <p:txBody>
-          <a:bodyPr wrap="square" anchor="ctr" lIns="0" rIns="0" tIns="0" bIns="0">
-            <a:spAutoFit/>
-          </a:bodyPr>
-          <a:lstStyle/>
-          <a:p>
-            <a:pPr algn="l"/>
-            <a:r>
-              <a:rPr sz="1000" b="0">
-                <a:solidFill>
-                  <a:srgbClr val="56616E"/>
-                </a:solidFill>
-                <a:latin typeface="Calibri"/>
-              </a:rPr>
-              <a:t>engineering students in India</a:t>
-            </a:r>
-          </a:p>
-        </p:txBody>
-      </p:sp>
-      <p:sp>
-        <p:nvSpPr>
-          <p:cNvPr id="66" name="Label: SAM"/>
-          <p:cNvSpPr/>
-          <p:nvPr/>
-        </p:nvSpPr>
-        <p:spPr>
-          <a:xfrm>
-            <a:off x="4182533" y="4591050"/>
-            <a:ext cx="431800" cy="215900"/>
-          </a:xfrm>
-          <a:prstGeom prst="roundRect">
-            <a:avLst>
-              <a:gd name="adj" fmla="val 30000"/>
-            </a:avLst>
-          </a:prstGeom>
-          <a:solidFill>
-            <a:srgbClr val="1B5E96"/>
-          </a:solidFill>
-          <a:ln>
-            <a:noFill/>
-          </a:ln>
-          <a:effectLst/>
-        </p:spPr>
-        <p:style>
-          <a:lnRef idx="1">
-            <a:schemeClr val="accent1"/>
-          </a:lnRef>
-          <a:fillRef idx="3">
-            <a:schemeClr val="accent1"/>
-          </a:fillRef>
-          <a:effectRef idx="2">
-            <a:schemeClr val="accent1"/>
-          </a:effectRef>
-          <a:fontRef idx="minor">
-            <a:schemeClr val="lt1"/>
-          </a:fontRef>
-        </p:style>
-        <p:txBody>
-          <a:bodyPr rtlCol="0" anchor="ctr"/>
-          <a:lstStyle/>
-          <a:p>
-            <a:pPr algn="ctr"/>
-          </a:p>
-        </p:txBody>
-      </p:sp>
-      <p:sp>
-        <p:nvSpPr>
-          <p:cNvPr id="67" name="TextBox 66"/>
-          <p:cNvSpPr txBox="1"/>
-          <p:nvPr/>
-        </p:nvSpPr>
-        <p:spPr>
-          <a:xfrm>
-            <a:off x="4182533" y="4591050"/>
-            <a:ext cx="431800" cy="215900"/>
-          </a:xfrm>
-          <a:prstGeom prst="rect">
-            <a:avLst/>
-          </a:prstGeom>
-          <a:noFill/>
-        </p:spPr>
-        <p:txBody>
-          <a:bodyPr wrap="square" anchor="ctr" lIns="0" rIns="0" tIns="0" bIns="0">
-            <a:spAutoFit/>
-          </a:bodyPr>
-          <a:lstStyle/>
-          <a:p>
-            <a:pPr algn="ctr"/>
-            <a:r>
-              <a:rPr sz="1000" b="1">
-                <a:solidFill>
-                  <a:srgbClr val="FFFFFF"/>
-                </a:solidFill>
-                <a:latin typeface="Calibri"/>
-              </a:rPr>
-              <a:t>SAM</a:t>
-            </a:r>
-          </a:p>
-        </p:txBody>
-      </p:sp>
-      <p:sp>
-        <p:nvSpPr>
-          <p:cNvPr id="68" name="TextBox 67"/>
-          <p:cNvSpPr txBox="1"/>
-          <p:nvPr/>
-        </p:nvSpPr>
-        <p:spPr>
-          <a:xfrm>
-            <a:off x="4690533" y="4591050"/>
-            <a:ext cx="939800" cy="215900"/>
-          </a:xfrm>
-          <a:prstGeom prst="rect">
-            <a:avLst/>
-          </a:prstGeom>
-          <a:noFill/>
-        </p:spPr>
-        <p:txBody>
-          <a:bodyPr wrap="square" anchor="ctr" lIns="0" rIns="0" tIns="0" bIns="0">
-            <a:spAutoFit/>
-          </a:bodyPr>
-          <a:lstStyle/>
-          <a:p>
-            <a:pPr algn="l"/>
-            <a:r>
-              <a:rPr sz="1000" b="1">
-                <a:solidFill>
-                  <a:srgbClr val="231F20"/>
-                </a:solidFill>
-                <a:latin typeface="Calibri"/>
-              </a:rPr>
-              <a:t>15.6 lakh</a:t>
-            </a:r>
-          </a:p>
-        </p:txBody>
-      </p:sp>
-      <p:sp>
-        <p:nvSpPr>
-          <p:cNvPr id="69" name="TextBox 68"/>
-          <p:cNvSpPr txBox="1"/>
-          <p:nvPr/>
-        </p:nvSpPr>
-        <p:spPr>
-          <a:xfrm>
-            <a:off x="5604933" y="4591050"/>
-            <a:ext cx="2404533" cy="215900"/>
-          </a:xfrm>
-          <a:prstGeom prst="rect">
-            <a:avLst/>
-          </a:prstGeom>
-          <a:noFill/>
-        </p:spPr>
-        <p:txBody>
-          <a:bodyPr wrap="square" anchor="ctr" lIns="0" rIns="0" tIns="0" bIns="0">
-            <a:spAutoFit/>
-          </a:bodyPr>
-          <a:lstStyle/>
-          <a:p>
-            <a:pPr algn="l"/>
-            <a:r>
-              <a:rPr sz="1000" b="0">
-                <a:solidFill>
-                  <a:srgbClr val="56616E"/>
-                </a:solidFill>
-                <a:latin typeface="Calibri"/>
-              </a:rPr>
-              <a:t>electrical, electronics, mechanical</a:t>
-            </a:r>
-          </a:p>
-        </p:txBody>
-      </p:sp>
-      <p:sp>
-        <p:nvSpPr>
-          <p:cNvPr id="70" name="Label: SOM"/>
-          <p:cNvSpPr/>
-          <p:nvPr/>
-        </p:nvSpPr>
-        <p:spPr>
-          <a:xfrm>
-            <a:off x="4182533" y="4845050"/>
-            <a:ext cx="431800" cy="215900"/>
-          </a:xfrm>
-          <a:prstGeom prst="roundRect">
-            <a:avLst>
-              <a:gd name="adj" fmla="val 30000"/>
-            </a:avLst>
-          </a:prstGeom>
-          <a:solidFill>
-            <a:srgbClr val="1B5E96"/>
-          </a:solidFill>
-          <a:ln>
-            <a:noFill/>
-          </a:ln>
-          <a:effectLst/>
-        </p:spPr>
-        <p:style>
-          <a:lnRef idx="1">
-            <a:schemeClr val="accent1"/>
-          </a:lnRef>
-          <a:fillRef idx="3">
-            <a:schemeClr val="accent1"/>
-          </a:fillRef>
-          <a:effectRef idx="2">
-            <a:schemeClr val="accent1"/>
-          </a:effectRef>
-          <a:fontRef idx="minor">
-            <a:schemeClr val="lt1"/>
-          </a:fontRef>
-        </p:style>
-        <p:txBody>
-          <a:bodyPr rtlCol="0" anchor="ctr"/>
-          <a:lstStyle/>
-          <a:p>
-            <a:pPr algn="ctr"/>
-          </a:p>
-        </p:txBody>
-      </p:sp>
-      <p:sp>
-        <p:nvSpPr>
-          <p:cNvPr id="71" name="TextBox 70"/>
-          <p:cNvSpPr txBox="1"/>
-          <p:nvPr/>
-        </p:nvSpPr>
-        <p:spPr>
-          <a:xfrm>
-            <a:off x="4182533" y="4845050"/>
-            <a:ext cx="431800" cy="215900"/>
-          </a:xfrm>
-          <a:prstGeom prst="rect">
-            <a:avLst/>
-          </a:prstGeom>
-          <a:noFill/>
-        </p:spPr>
-        <p:txBody>
-          <a:bodyPr wrap="square" anchor="ctr" lIns="0" rIns="0" tIns="0" bIns="0">
-            <a:spAutoFit/>
-          </a:bodyPr>
-          <a:lstStyle/>
-          <a:p>
-            <a:pPr algn="ctr"/>
-            <a:r>
-              <a:rPr sz="1000" b="1">
-                <a:solidFill>
-                  <a:srgbClr val="FFFFFF"/>
-                </a:solidFill>
-                <a:latin typeface="Calibri"/>
-              </a:rPr>
-              <a:t>SOM</a:t>
-            </a:r>
-          </a:p>
-        </p:txBody>
-      </p:sp>
-      <p:sp>
-        <p:nvSpPr>
-          <p:cNvPr id="72" name="TextBox 71"/>
-          <p:cNvSpPr txBox="1"/>
-          <p:nvPr/>
-        </p:nvSpPr>
-        <p:spPr>
-          <a:xfrm>
-            <a:off x="4690533" y="4845050"/>
-            <a:ext cx="939800" cy="215900"/>
-          </a:xfrm>
-          <a:prstGeom prst="rect">
-            <a:avLst/>
-          </a:prstGeom>
-          <a:noFill/>
-        </p:spPr>
-        <p:txBody>
-          <a:bodyPr wrap="square" anchor="ctr" lIns="0" rIns="0" tIns="0" bIns="0">
-            <a:spAutoFit/>
-          </a:bodyPr>
-          <a:lstStyle/>
-          <a:p>
-            <a:pPr algn="l"/>
-            <a:r>
-              <a:rPr sz="1000" b="1">
-                <a:solidFill>
-                  <a:srgbClr val="231F20"/>
-                </a:solidFill>
-                <a:latin typeface="Calibri"/>
-              </a:rPr>
-              <a:t>130 colleges</a:t>
-            </a:r>
-          </a:p>
-        </p:txBody>
-      </p:sp>
-      <p:sp>
-        <p:nvSpPr>
-          <p:cNvPr id="73" name="TextBox 72"/>
-          <p:cNvSpPr txBox="1"/>
-          <p:nvPr/>
-        </p:nvSpPr>
-        <p:spPr>
-          <a:xfrm>
-            <a:off x="5604933" y="4845050"/>
-            <a:ext cx="2404533" cy="215900"/>
-          </a:xfrm>
-          <a:prstGeom prst="rect">
-            <a:avLst/>
-          </a:prstGeom>
-          <a:noFill/>
-        </p:spPr>
-        <p:txBody>
-          <a:bodyPr wrap="square" anchor="ctr" lIns="0" rIns="0" tIns="0" bIns="0">
-            <a:spAutoFit/>
-          </a:bodyPr>
-          <a:lstStyle/>
-          <a:p>
-            <a:pPr algn="l"/>
-            <a:r>
-              <a:rPr sz="1000" b="0">
-                <a:solidFill>
-                  <a:srgbClr val="56616E"/>
-                </a:solidFill>
-                <a:latin typeface="Calibri"/>
-              </a:rPr>
-              <a:t>5% of 2,610, assumed</a:t>
-            </a:r>
-          </a:p>
-        </p:txBody>
-      </p:sp>
-      <p:sp>
-        <p:nvSpPr>
-          <p:cNvPr id="74" name="Business"/>
-          <p:cNvSpPr txBox="1"/>
-          <p:nvPr/>
-        </p:nvSpPr>
-        <p:spPr>
-          <a:xfrm>
-            <a:off x="4182533" y="5137150"/>
-            <a:ext cx="3826933" cy="508000"/>
-          </a:xfrm>
-          <a:prstGeom prst="rect">
-            <a:avLst/>
-          </a:prstGeom>
-          <a:noFill/>
-        </p:spPr>
-        <p:txBody>
-          <a:bodyPr wrap="square" anchor="t" lIns="0" rIns="0" tIns="0" bIns="0">
-            <a:spAutoFit/>
-          </a:bodyPr>
-          <a:lstStyle/>
-          <a:p>
-            <a:pPr algn="l"/>
-            <a:r>
-              <a:rPr sz="1000" b="1">
-                <a:solidFill>
-                  <a:srgbClr val="231F20"/>
-                </a:solidFill>
-                <a:latin typeface="Calibri"/>
-              </a:rPr>
-              <a:t>Free for students, paid for labs and teams. </a:t>
-            </a:r>
-            <a:r>
-              <a:rPr sz="1000" b="0">
-                <a:solidFill>
-                  <a:srgbClr val="231F20"/>
-                </a:solidFill>
-                <a:latin typeface="Calibri"/>
-              </a:rPr>
-              <a:t>At an assumed ₹50,000 a lab, that is ₹65 lakh a year. </a:t>
-            </a:r>
-            <a:r>
-              <a:rPr sz="1000" b="1">
-                <a:solidFill>
-                  <a:srgbClr val="231F20"/>
-                </a:solidFill>
-                <a:latin typeface="Calibri"/>
-              </a:rPr>
-              <a:t>Works with any cell</a:t>
-            </a:r>
-            <a:r>
-              <a:rPr sz="1000" b="0">
-                <a:solidFill>
-                  <a:srgbClr val="231F20"/>
-                </a:solidFill>
-                <a:latin typeface="Calibri"/>
-              </a:rPr>
-              <a:t> through custom imports.</a:t>
-            </a:r>
-          </a:p>
-        </p:txBody>
-      </p:sp>
-      <p:sp>
-        <p:nvSpPr>
-          <p:cNvPr id="75" name="Honest Finding"/>
-          <p:cNvSpPr/>
-          <p:nvPr/>
-        </p:nvSpPr>
-        <p:spPr>
-          <a:xfrm>
-            <a:off x="8187266" y="4083050"/>
-            <a:ext cx="3826933" cy="1574800"/>
-          </a:xfrm>
-          <a:prstGeom prst="roundRect">
-            <a:avLst>
-              <a:gd name="adj" fmla="val 5000"/>
-            </a:avLst>
-          </a:prstGeom>
-          <a:noFill/>
-          <a:ln w="9525">
-            <a:solidFill>
-              <a:srgbClr val="D9480F"/>
-            </a:solidFill>
-          </a:ln>
-          <a:effectLst/>
-        </p:spPr>
-        <p:style>
-          <a:lnRef idx="1">
-            <a:schemeClr val="accent1"/>
-          </a:lnRef>
-          <a:fillRef idx="3">
-            <a:schemeClr val="accent1"/>
-          </a:fillRef>
-          <a:effectRef idx="2">
-            <a:schemeClr val="accent1"/>
-          </a:effectRef>
-          <a:fontRef idx="minor">
-            <a:schemeClr val="lt1"/>
-          </a:fontRef>
-        </p:style>
-        <p:txBody>
-          <a:bodyPr rtlCol="0" anchor="ctr"/>
-          <a:lstStyle/>
-          <a:p>
-            <a:pPr algn="ctr"/>
-          </a:p>
-        </p:txBody>
-      </p:sp>
-      <p:sp>
-        <p:nvSpPr>
-          <p:cNvPr id="76" name="Honest Finding text"/>
-          <p:cNvSpPr txBox="1"/>
-          <p:nvPr/>
-        </p:nvSpPr>
-        <p:spPr>
-          <a:xfrm>
-            <a:off x="8263466" y="4121150"/>
-            <a:ext cx="3674533" cy="1524000"/>
-          </a:xfrm>
-          <a:prstGeom prst="rect">
-            <a:avLst/>
-          </a:prstGeom>
-          <a:noFill/>
-        </p:spPr>
-        <p:txBody>
-          <a:bodyPr wrap="square" anchor="t" lIns="0" rIns="0" tIns="0" bIns="0">
-            <a:spAutoFit/>
-          </a:bodyPr>
-          <a:lstStyle/>
-          <a:p>
-            <a:pPr algn="l">
-              <a:spcAft>
-                <a:spcPts val="150"/>
-              </a:spcAft>
-            </a:pPr>
-            <a:r>
-              <a:rPr sz="1000" b="1">
-                <a:solidFill>
-                  <a:srgbClr val="D9480F"/>
-                </a:solidFill>
-                <a:latin typeface="Calibri"/>
-              </a:rPr>
-              <a:t>Honest finding</a:t>
-            </a:r>
-          </a:p>
-          <a:p>
-            <a:pPr algn="l">
-              <a:spcAft>
-                <a:spcPts val="150"/>
-              </a:spcAft>
-            </a:pPr>
-            <a:r>
-              <a:rPr sz="1000" b="1">
-                <a:solidFill>
-                  <a:srgbClr val="231F20"/>
-                </a:solidFill>
-                <a:latin typeface="Calibri"/>
-              </a:rPr>
-              <a:t>Less margin: </a:t>
-            </a:r>
-            <a:r>
-              <a:rPr sz="1000" b="0">
-                <a:solidFill>
-                  <a:srgbClr val="231F20"/>
-                </a:solidFill>
-                <a:latin typeface="Calibri"/>
-              </a:rPr>
-              <a:t>2 of 62 mixed samples were refused at 12 A, while all 62 passed at the Pi load.</a:t>
-            </a:r>
-          </a:p>
-          <a:p>
-            <a:pPr algn="l">
-              <a:spcAft>
-                <a:spcPts val="150"/>
-              </a:spcAft>
-            </a:pPr>
-            <a:r>
-              <a:rPr sz="1000" b="1">
-                <a:solidFill>
-                  <a:srgbClr val="231F20"/>
-                </a:solidFill>
-                <a:latin typeface="Calibri"/>
-              </a:rPr>
-              <a:t>No link option wins every case: </a:t>
-            </a:r>
-            <a:r>
-              <a:rPr sz="1000" b="0">
-                <a:solidFill>
-                  <a:srgbClr val="231F20"/>
-                </a:solidFill>
-                <a:latin typeface="Calibri"/>
-              </a:rPr>
-              <a:t>moving the output to the far cell eased worst-case current from 5.49 to 5.33 A, yet raised peak current in 35 of 81 pairs.</a:t>
-            </a:r>
-          </a:p>
-          <a:p>
-            <a:pPr algn="l">
-              <a:spcAft>
-                <a:spcPts val="150"/>
-              </a:spcAft>
-            </a:pPr>
-            <a:r>
-              <a:rPr sz="1000" b="1">
-                <a:solidFill>
-                  <a:srgbClr val="231F20"/>
-                </a:solidFill>
-                <a:latin typeface="Calibri"/>
-              </a:rPr>
-              <a:t>Not proven: </a:t>
-            </a:r>
-            <a:r>
-              <a:rPr sz="1000" b="0">
-                <a:solidFill>
-                  <a:srgbClr val="231F20"/>
-                </a:solidFill>
-                <a:latin typeface="Calibri"/>
-              </a:rPr>
-              <a:t>the board on two cells, a real Pi draw or measured accuracy. The saving is cells only.</a:t>
-            </a:r>
-          </a:p>
-          <a:p>
-            <a:pPr algn="l">
-              <a:spcAft>
-                <a:spcPts val="150"/>
-              </a:spcAft>
-            </a:pPr>
-            <a:r>
-              <a:rPr sz="1000" b="1">
-                <a:solidFill>
-                  <a:srgbClr val="231F20"/>
-                </a:solidFill>
-                <a:latin typeface="Calibri"/>
-              </a:rPr>
-              <a:t>Next, Round 2: </a:t>
-            </a:r>
-            <a:r>
-              <a:rPr sz="1000" b="0">
-                <a:solidFill>
-                  <a:srgbClr val="231F20"/>
-                </a:solidFill>
-                <a:latin typeface="Calibri"/>
-              </a:rPr>
-              <a:t>bench-test two cells on the board and run user trials.</a:t>
-            </a:r>
-          </a:p>
-        </p:txBody>
-      </p:sp>
-      <p:sp>
-        <p:nvSpPr>
-          <p:cNvPr id="77" name="So what"/>
-          <p:cNvSpPr/>
-          <p:nvPr/>
-        </p:nvSpPr>
-        <p:spPr>
-          <a:xfrm>
-            <a:off x="177800" y="5734050"/>
-            <a:ext cx="11836400" cy="304800"/>
-          </a:xfrm>
-          <a:prstGeom prst="roundRect">
-            <a:avLst>
-              <a:gd name="adj" fmla="val 25000"/>
-            </a:avLst>
-          </a:prstGeom>
-          <a:solidFill>
-            <a:srgbClr val="1B5E96"/>
-          </a:solidFill>
-          <a:ln>
-            <a:noFill/>
-          </a:ln>
-          <a:effectLst/>
-        </p:spPr>
-        <p:style>
-          <a:lnRef idx="1">
-            <a:schemeClr val="accent1"/>
-          </a:lnRef>
-          <a:fillRef idx="3">
-            <a:schemeClr val="accent1"/>
-          </a:fillRef>
-          <a:effectRef idx="2">
-            <a:schemeClr val="accent1"/>
-          </a:effectRef>
-          <a:fontRef idx="minor">
-            <a:schemeClr val="lt1"/>
-          </a:fontRef>
-        </p:style>
-        <p:txBody>
-          <a:bodyPr rtlCol="0" anchor="ctr"/>
-          <a:lstStyle/>
-          <a:p>
-            <a:pPr algn="ctr"/>
-          </a:p>
-        </p:txBody>
-      </p:sp>
-      <p:sp>
-        <p:nvSpPr>
-          <p:cNvPr id="78" name="So what text"/>
-          <p:cNvSpPr txBox="1"/>
-          <p:nvPr/>
-        </p:nvSpPr>
-        <p:spPr>
-          <a:xfrm>
-            <a:off x="279400" y="5734050"/>
-            <a:ext cx="11633200" cy="304800"/>
-          </a:xfrm>
-          <a:prstGeom prst="rect">
-            <a:avLst/>
-          </a:prstGeom>
-          <a:noFill/>
-        </p:spPr>
-        <p:txBody>
-          <a:bodyPr wrap="square" anchor="ctr" lIns="0" rIns="0" tIns="0" bIns="0">
-            <a:spAutoFit/>
-          </a:bodyPr>
-          <a:lstStyle/>
-          <a:p>
-            <a:pPr algn="ctr"/>
-            <a:r>
-              <a:rPr sz="1100" b="1">
-                <a:solidFill>
-                  <a:srgbClr val="FFFFFF"/>
-                </a:solidFill>
-                <a:latin typeface="Calibri"/>
-              </a:rPr>
-              <a:t>Test a design in seconds before you buy parts: </a:t>
-            </a:r>
-            <a:r>
-              <a:rPr sz="1100" b="0">
-                <a:solidFill>
-                  <a:srgbClr val="FFFFFF"/>
-                </a:solidFill>
-                <a:latin typeface="Calibri"/>
-              </a:rPr>
-              <a:t>the tool found a smaller battery that still does the job in simulation, at half the cell cost and mass.</a:t>
-            </a:r>
-          </a:p>
-        </p:txBody>
-      </p:sp>
-      <p:sp>
-        <p:nvSpPr>
-          <p:cNvPr id="79" name="Sources"/>
-          <p:cNvSpPr txBox="1"/>
-          <p:nvPr/>
-        </p:nvSpPr>
-        <p:spPr>
-          <a:xfrm>
-            <a:off x="177800" y="6089650"/>
-            <a:ext cx="11836400" cy="381000"/>
-          </a:xfrm>
-          <a:prstGeom prst="rect">
-            <a:avLst/>
-          </a:prstGeom>
-          <a:noFill/>
-        </p:spPr>
-        <p:txBody>
-          <a:bodyPr wrap="square" anchor="t" lIns="0" rIns="0" tIns="0" bIns="0">
-            <a:spAutoFit/>
-          </a:bodyPr>
-          <a:lstStyle/>
-          <a:p>
-            <a:pPr algn="l"/>
-            <a:r>
-              <a:rPr sz="750" b="1">
-                <a:solidFill>
-                  <a:srgbClr val="56616E"/>
-                </a:solidFill>
-                <a:latin typeface="Calibri"/>
-              </a:rPr>
-              <a:t>Simulation, not hardware. </a:t>
-            </a:r>
-            <a:r>
-              <a:rPr sz="750" b="0">
-                <a:solidFill>
-                  <a:srgbClr val="56616E"/>
-                </a:solidFill>
-                <a:latin typeface="Calibri"/>
-              </a:rPr>
-              <a:t>4,006 simulated cases on published LG M50T tables. Smallest qualifying design among the parallel arrangements tested. 8.42 A = 25 W ÷ (0.9 × 3.3 V), held constant. Prices checked 30 Oct 2026, excluding shipping and fabrication: Robu ₹1,206 incl. GST, out of stock; Geekworm US$52, one listing. Measured: Chen et al. 2020 (LG M50, zenodo.4032561) and Piombo et al. 2024 test 28 (M50T, 10.17632/zh58byr53c.2); low-cooling bars are post-hoc. Market: AISHE 2021-22; price and 5% reach are assumptions.</a:t>
-            </a:r>
-          </a:p>
-        </p:txBody>
-      </p:sp>
     </p:spTree>
     <p:extLst>
       <p:ext uri="{BB962C8B-B14F-4D97-AF65-F5344CB8AC3E}">
@@ -11080,4 +7316,324 @@
     </a:ext>
   </a:extLst>
 </a:theme>
+</file>
+
+<file path=ppt/theme/theme3.xml><?xml version="1.0" encoding="utf-8"?>
+<a:theme xmlns:a="http://schemas.openxmlformats.org/drawingml/2006/main" name="Office Theme">
+  <a:themeElements>
+    <a:clrScheme name="Office">
+      <a:dk1>
+        <a:sysClr val="windowText" lastClr="000000"/>
+      </a:dk1>
+      <a:lt1>
+        <a:sysClr val="window" lastClr="FFFFFF"/>
+      </a:lt1>
+      <a:dk2>
+        <a:srgbClr val="1F497D"/>
+      </a:dk2>
+      <a:lt2>
+        <a:srgbClr val="EEECE1"/>
+      </a:lt2>
+      <a:accent1>
+        <a:srgbClr val="4F81BD"/>
+      </a:accent1>
+      <a:accent2>
+        <a:srgbClr val="C0504D"/>
+      </a:accent2>
+      <a:accent3>
+        <a:srgbClr val="9BBB59"/>
+      </a:accent3>
+      <a:accent4>
+        <a:srgbClr val="8064A2"/>
+      </a:accent4>
+      <a:accent5>
+        <a:srgbClr val="4BACC6"/>
+      </a:accent5>
+      <a:accent6>
+        <a:srgbClr val="F79646"/>
+      </a:accent6>
+      <a:hlink>
+        <a:srgbClr val="0000FF"/>
+      </a:hlink>
+      <a:folHlink>
+        <a:srgbClr val="800080"/>
+      </a:folHlink>
+    </a:clrScheme>
+    <a:fontScheme name="Office">
+      <a:majorFont>
+        <a:latin typeface="Calibri"/>
+        <a:ea typeface=""/>
+        <a:cs typeface=""/>
+        <a:font script="Jpan" typeface="ＭＳ Ｐゴシック"/>
+        <a:font script="Hang" typeface="맑은 고딕"/>
+        <a:font script="Hans" typeface="宋体"/>
+        <a:font script="Hant" typeface="新細明體"/>
+        <a:font script="Arab" typeface="Times New Roman"/>
+        <a:font script="Hebr" typeface="Times New Roman"/>
+        <a:font script="Thai" typeface="Angsana New"/>
+        <a:font script="Ethi" typeface="Nyala"/>
+        <a:font script="Beng" typeface="Vrinda"/>
+        <a:font script="Gujr" typeface="Shruti"/>
+        <a:font script="Khmr" typeface="MoolBoran"/>
+        <a:font script="Knda" typeface="Tunga"/>
+        <a:font script="Guru" typeface="Raavi"/>
+        <a:font script="Cans" typeface="Euphemia"/>
+        <a:font script="Cher" typeface="Plantagenet Cherokee"/>
+        <a:font script="Yiii" typeface="Microsoft Yi Baiti"/>
+        <a:font script="Tibt" typeface="Microsoft Himalaya"/>
+        <a:font script="Thaa" typeface="MV Boli"/>
+        <a:font script="Deva" typeface="Mangal"/>
+        <a:font script="Telu" typeface="Gautami"/>
+        <a:font script="Taml" typeface="Latha"/>
+        <a:font script="Syrc" typeface="Estrangelo Edessa"/>
+        <a:font script="Orya" typeface="Kalinga"/>
+        <a:font script="Mlym" typeface="Kartika"/>
+        <a:font script="Laoo" typeface="DokChampa"/>
+        <a:font script="Sinh" typeface="Iskoola Pota"/>
+        <a:font script="Mong" typeface="Mongolian Baiti"/>
+        <a:font script="Viet" typeface="Times New Roman"/>
+        <a:font script="Uigh" typeface="Microsoft Uighur"/>
+        <a:font script="Geor" typeface="Sylfaen"/>
+      </a:majorFont>
+      <a:minorFont>
+        <a:latin typeface="Calibri"/>
+        <a:ea typeface=""/>
+        <a:cs typeface=""/>
+        <a:font script="Jpan" typeface="ＭＳ Ｐゴシック"/>
+        <a:font script="Hang" typeface="맑은 고딕"/>
+        <a:font script="Hans" typeface="宋体"/>
+        <a:font script="Hant" typeface="新細明體"/>
+        <a:font script="Arab" typeface="Arial"/>
+        <a:font script="Hebr" typeface="Arial"/>
+        <a:font script="Thai" typeface="Cordia New"/>
+        <a:font script="Ethi" typeface="Nyala"/>
+        <a:font script="Beng" typeface="Vrinda"/>
+        <a:font script="Gujr" typeface="Shruti"/>
+        <a:font script="Khmr" typeface="DaunPenh"/>
+        <a:font script="Knda" typeface="Tunga"/>
+        <a:font script="Guru" typeface="Raavi"/>
+        <a:font script="Cans" typeface="Euphemia"/>
+        <a:font script="Cher" typeface="Plantagenet Cherokee"/>
+        <a:font script="Yiii" typeface="Microsoft Yi Baiti"/>
+        <a:font script="Tibt" typeface="Microsoft Himalaya"/>
+        <a:font script="Thaa" typeface="MV Boli"/>
+        <a:font script="Deva" typeface="Mangal"/>
+        <a:font script="Telu" typeface="Gautami"/>
+        <a:font script="Taml" typeface="Latha"/>
+        <a:font script="Syrc" typeface="Estrangelo Edessa"/>
+        <a:font script="Orya" typeface="Kalinga"/>
+        <a:font script="Mlym" typeface="Kartika"/>
+        <a:font script="Laoo" typeface="DokChampa"/>
+        <a:font script="Sinh" typeface="Iskoola Pota"/>
+        <a:font script="Mong" typeface="Mongolian Baiti"/>
+        <a:font script="Viet" typeface="Arial"/>
+        <a:font script="Uigh" typeface="Microsoft Uighur"/>
+        <a:font script="Geor" typeface="Sylfaen"/>
+      </a:minorFont>
+    </a:fontScheme>
+    <a:fmtScheme name="Office">
+      <a:fillStyleLst>
+        <a:solidFill>
+          <a:schemeClr val="phClr"/>
+        </a:solidFill>
+        <a:gradFill rotWithShape="1">
+          <a:gsLst>
+            <a:gs pos="0">
+              <a:schemeClr val="phClr">
+                <a:tint val="50000"/>
+                <a:satMod val="300000"/>
+              </a:schemeClr>
+            </a:gs>
+            <a:gs pos="35000">
+              <a:schemeClr val="phClr">
+                <a:tint val="37000"/>
+                <a:satMod val="300000"/>
+              </a:schemeClr>
+            </a:gs>
+            <a:gs pos="100000">
+              <a:schemeClr val="phClr">
+                <a:tint val="15000"/>
+                <a:satMod val="350000"/>
+              </a:schemeClr>
+            </a:gs>
+          </a:gsLst>
+          <a:lin ang="16200000" scaled="1"/>
+        </a:gradFill>
+        <a:gradFill rotWithShape="1">
+          <a:gsLst>
+            <a:gs pos="0">
+              <a:schemeClr val="phClr">
+                <a:tint val="100000"/>
+                <a:shade val="100000"/>
+                <a:satMod val="130000"/>
+              </a:schemeClr>
+            </a:gs>
+            <a:gs pos="100000">
+              <a:schemeClr val="phClr">
+                <a:tint val="50000"/>
+                <a:shade val="100000"/>
+                <a:satMod val="350000"/>
+              </a:schemeClr>
+            </a:gs>
+          </a:gsLst>
+          <a:lin ang="16200000" scaled="0"/>
+        </a:gradFill>
+      </a:fillStyleLst>
+      <a:lnStyleLst>
+        <a:ln w="9525" cap="flat" cmpd="sng" algn="ctr">
+          <a:solidFill>
+            <a:schemeClr val="phClr">
+              <a:shade val="95000"/>
+              <a:satMod val="105000"/>
+            </a:schemeClr>
+          </a:solidFill>
+          <a:prstDash val="solid"/>
+        </a:ln>
+        <a:ln w="25400" cap="flat" cmpd="sng" algn="ctr">
+          <a:solidFill>
+            <a:schemeClr val="phClr"/>
+          </a:solidFill>
+          <a:prstDash val="solid"/>
+        </a:ln>
+        <a:ln w="38100" cap="flat" cmpd="sng" algn="ctr">
+          <a:solidFill>
+            <a:schemeClr val="phClr"/>
+          </a:solidFill>
+          <a:prstDash val="solid"/>
+        </a:ln>
+      </a:lnStyleLst>
+      <a:effectStyleLst>
+        <a:effectStyle>
+          <a:effectLst>
+            <a:outerShdw blurRad="40000" dist="20000" dir="5400000" rotWithShape="0">
+              <a:srgbClr val="000000">
+                <a:alpha val="38000"/>
+              </a:srgbClr>
+            </a:outerShdw>
+          </a:effectLst>
+        </a:effectStyle>
+        <a:effectStyle>
+          <a:effectLst>
+            <a:outerShdw blurRad="40000" dist="23000" dir="5400000" rotWithShape="0">
+              <a:srgbClr val="000000">
+                <a:alpha val="35000"/>
+              </a:srgbClr>
+            </a:outerShdw>
+          </a:effectLst>
+        </a:effectStyle>
+        <a:effectStyle>
+          <a:effectLst>
+            <a:outerShdw blurRad="40000" dist="23000" dir="5400000" rotWithShape="0">
+              <a:srgbClr val="000000">
+                <a:alpha val="35000"/>
+              </a:srgbClr>
+            </a:outerShdw>
+          </a:effectLst>
+          <a:scene3d>
+            <a:camera prst="orthographicFront">
+              <a:rot lat="0" lon="0" rev="0"/>
+            </a:camera>
+            <a:lightRig rig="threePt" dir="t">
+              <a:rot lat="0" lon="0" rev="1200000"/>
+            </a:lightRig>
+          </a:scene3d>
+          <a:sp3d>
+            <a:bevelT w="63500" h="25400"/>
+          </a:sp3d>
+        </a:effectStyle>
+      </a:effectStyleLst>
+      <a:bgFillStyleLst>
+        <a:solidFill>
+          <a:schemeClr val="phClr"/>
+        </a:solidFill>
+        <a:gradFill rotWithShape="1">
+          <a:gsLst>
+            <a:gs pos="0">
+              <a:schemeClr val="phClr">
+                <a:tint val="40000"/>
+                <a:satMod val="350000"/>
+              </a:schemeClr>
+            </a:gs>
+            <a:gs pos="40000">
+              <a:schemeClr val="phClr">
+                <a:tint val="45000"/>
+                <a:shade val="99000"/>
+                <a:satMod val="350000"/>
+              </a:schemeClr>
+            </a:gs>
+            <a:gs pos="100000">
+              <a:schemeClr val="phClr">
+                <a:shade val="20000"/>
+                <a:satMod val="255000"/>
+              </a:schemeClr>
+            </a:gs>
+          </a:gsLst>
+          <a:path path="circle">
+            <a:fillToRect l="50000" t="-80000" r="50000" b="180000"/>
+          </a:path>
+        </a:gradFill>
+        <a:gradFill rotWithShape="1">
+          <a:gsLst>
+            <a:gs pos="0">
+              <a:schemeClr val="phClr">
+                <a:tint val="80000"/>
+                <a:satMod val="300000"/>
+              </a:schemeClr>
+            </a:gs>
+            <a:gs pos="100000">
+              <a:schemeClr val="phClr">
+                <a:shade val="30000"/>
+                <a:satMod val="200000"/>
+              </a:schemeClr>
+            </a:gs>
+          </a:gsLst>
+          <a:path path="circle">
+            <a:fillToRect l="50000" t="50000" r="50000" b="50000"/>
+          </a:path>
+        </a:gradFill>
+      </a:bgFillStyleLst>
+    </a:fmtScheme>
+  </a:themeElements>
+  <a:objectDefaults>
+    <a:spDef>
+      <a:spPr/>
+      <a:bodyPr/>
+      <a:lstStyle/>
+      <a:style>
+        <a:lnRef idx="1">
+          <a:schemeClr val="accent1"/>
+        </a:lnRef>
+        <a:fillRef idx="3">
+          <a:schemeClr val="accent1"/>
+        </a:fillRef>
+        <a:effectRef idx="2">
+          <a:schemeClr val="accent1"/>
+        </a:effectRef>
+        <a:fontRef idx="minor">
+          <a:schemeClr val="lt1"/>
+        </a:fontRef>
+      </a:style>
+    </a:spDef>
+    <a:lnDef>
+      <a:spPr/>
+      <a:bodyPr/>
+      <a:lstStyle/>
+      <a:style>
+        <a:lnRef idx="2">
+          <a:schemeClr val="accent1"/>
+        </a:lnRef>
+        <a:fillRef idx="0">
+          <a:schemeClr val="accent1"/>
+        </a:fillRef>
+        <a:effectRef idx="1">
+          <a:schemeClr val="accent1"/>
+        </a:effectRef>
+        <a:fontRef idx="minor">
+          <a:schemeClr val="tx1"/>
+        </a:fontRef>
+      </a:style>
+    </a:lnDef>
+  </a:objectDefaults>
+  <a:extraClrSchemeLst/>
+</a:theme>
 </file>
--- a/reports/slide_v4/VOLT-FORGE_Round1_Slide.pptx
+++ b/reports/slide_v4/VOLT-FORGE_Round1_Slide.pptx
@@ -546,6 +546,16 @@
           <a:p>
             <a:r>
               <a:t>Market: AISHE 2021-22. The price of Rs 50,000 a lab and 5% reach are assumptions, and counts do not show willingness to pay.</a:t>
+            </a:r>
+          </a:p>
+          <a:p>
+            <a:r>
+              <a:t>Build cost: about Rs 35 crore over 3 years and 100.5 person-years for the full product vision. An estimate from sourced salary rates and assumed staffing, cross-checked with COCOMO II. See reports/build_cost_v1/BUILD_COST.md. AspenTech fiscal 2024 R&amp;D was US$206.1 million.</a:t>
+            </a:r>
+          </a:p>
+          <a:p>
+            <a:r>
+              <a:t>Screens: real designs in the app. The 16-cell and 12-cell modules are examples of what it can handle, not the recommended design.</a:t>
             </a:r>
           </a:p>
         </p:txBody>
@@ -6761,7 +6771,7 @@
       </p:pic>
       <p:pic>
         <p:nvPicPr>
-          <p:cNvPr id="8" name="VOLT-FORGE Round 1 slide" descr="VOLT-FORGE: the seven rubric criteria around the working app, with its canvas and test verdict at the centre."/>
+          <p:cNvPr id="8" name="VOLT-FORGE Round 1 slide" descr="VOLT-FORGE: the seven rubric criteria around the working app, showing a 16-cell circuit with a cell properties panel, and a comparison of two circuits."/>
           <p:cNvPicPr>
             <a:picLocks noChangeAspect="1"/>
           </p:cNvPicPr>

--- a/reports/slide_v4/VOLT-FORGE_Round1_Slide.pptx
+++ b/reports/slide_v4/VOLT-FORGE_Round1_Slide.pptx
@@ -551,6 +551,11 @@
           <a:p>
             <a:r>
               <a:t>Build cost: about Rs 35 crore over 3 years and 100.5 person-years for the full product vision. An estimate from sourced salary rates and assumed staffing, cross-checked with COCOMO II. See reports/build_cost_v1/BUILD_COST.md. AspenTech fiscal 2024 R&amp;D was US$206.1 million.</a:t>
+            </a:r>
+          </a:p>
+          <a:p>
+            <a:r>
+              <a:t>KPIs: 42 of 4,006 study runs were refused because a cell would have exceeded 7.275 A. A 10-minute run of the 16-cell module took a median 3.07 s on Apple M1, 8 GB, Darwin.</a:t>
             </a:r>
           </a:p>
           <a:p>

--- a/reports/slide_v4/VOLT-FORGE_Round1_Slide.pptx
+++ b/reports/slide_v4/VOLT-FORGE_Round1_Slide.pptx
@@ -555,12 +555,12 @@
           </a:p>
           <a:p>
             <a:r>
-              <a:t>KPIs: 42 of 4,006 study runs were refused because a cell would have exceeded 7.275 A. A 10-minute run of the 16-cell module took a median 3.07 s on Apple M1, 8 GB, Darwin.</a:t>
-            </a:r>
-          </a:p>
-          <a:p>
-            <a:r>
-              <a:t>Screens: real designs in the app. The 16-cell and 12-cell modules are examples of what it can handle, not the recommended design.</a:t>
+              <a:t>KPIs: 54 module experiments and 194 data files in the Piombo et al. dataset, each file integrity-checked. 9 records are reserved for a final assessment and were never opened: 3 module tests and 6 Samsung cell records.</a:t>
+            </a:r>
+          </a:p>
+          <a:p>
+            <a:r>
+              <a:t>Screens: real designs in the app. The table compares the 4-cell starting design with the 2-cell design under the same 8.42 A load.</a:t>
             </a:r>
           </a:p>
         </p:txBody>
@@ -6776,7 +6776,7 @@
       </p:pic>
       <p:pic>
         <p:nvPicPr>
-          <p:cNvPr id="8" name="VOLT-FORGE Round 1 slide" descr="VOLT-FORGE: the seven rubric criteria around the working app, showing a 16-cell circuit with a cell properties panel, and a comparison of two circuits."/>
+          <p:cNvPr id="8" name="VOLT-FORGE Round 1 slide" descr="VOLT-FORGE: the seven rubric criteria around the working app, showing the 4-cell Pi circuit with a cell properties panel, and a comparison of the 4-cell and 2-cell designs."/>
           <p:cNvPicPr>
             <a:picLocks noChangeAspect="1"/>
           </p:cNvPicPr>

--- a/reports/slide_v4/VOLT-FORGE_Round1_Slide.pptx
+++ b/reports/slide_v4/VOLT-FORGE_Round1_Slide.pptx
@@ -530,12 +530,27 @@
           </a:p>
           <a:p>
             <a:r>
-              <a:t>Real data: all 12 pre-declared comparison cases missed their bands. Sources: Chen et al. 2020 (LG M50, zenodo.4032561) and Piombo et al. 2024 test 28 (M50T, 10.17632/zh58byr53c.2).</a:t>
-            </a:r>
-          </a:p>
-          <a:p>
-            <a:r>
-              <a:t>Not proven: the Geekworm X1206 V2.0 board running on two cells, a real Pi draw, or measured accuracy.</a:t>
+              <a:t>Real data: all 12 pre-declared full-discharge checks missed their bands, on voltage and on temperature. These are 8 measured discharges and 4 sensitivity reruns. Sources: Chen et al. 2020 (LG M50, zenodo.4032561) and Piombo et al. 2024 test 28 (M50T, 10.17632/zh58byr53c.2).</a:t>
+            </a:r>
+          </a:p>
+          <a:p>
+            <a:r>
+              <a:t>Board: Geekworm X1205 2-cell UPS HAT, US$46, 5.1 V at up to 6 A, up to 95% efficiency and a 2.4 V cutoff, from its listing and wiki. Its battery overcurrent threshold is not published.</a:t>
+            </a:r>
+          </a:p>
+          <a:p>
+            <a:r>
+              <a:t>Current shares: Piombo test 28, first 10% of the discharge, measured against simulated, with Hall channels normalised to their own sum. Average error 1.13 points against 2.38 for an equal-share guess, inside the frozen 2.5 point band. The busiest cell was named in 62% of samples against a required 80%, so that part missed. The equal-share comparison was added after the run. This is one test with 3 mOhm links, early in the discharge; later on the error is larger, and the near-zero-link test shared evenly. Over the first 10 minutes, real heating was 0.27 to 1.13 times the model across 8 discharges, also added after the run.</a:t>
+            </a:r>
+          </a:p>
+          <a:p>
+            <a:r>
+              <a:t>Heat: real rises reached 2.27 times the simulated rise. Applied to the 2-cell worst case that gives 42.4 C against the LG 55 C limit. Voltage: the largest error in the Pi's charge range was 0.17 V against a 0.20 V margin.</a:t>
+            </a:r>
+          </a:p>
+          <a:p>
+            <a:r>
+              <a:t>Not proven: a real Pi draw on this board, the board's overcurrent limit, or measured accuracy. Below 10 C the LG limit falls to 2.425 A a cell, so two cells could not carry this load.</a:t>
             </a:r>
           </a:p>
           <a:p>
@@ -550,12 +565,22 @@
           </a:p>
           <a:p>
             <a:r>
+              <a:t>Business: free for students, labs and teams pay, as a hypothesis. Stage one is dataset, results, quality and the lab, Rs 11.0 crore. That is Rs 2.2 crore a year for 5 years, before running costs. 130 labs at Rs 50,000 give Rs 65 lakh, and 31 teams at an assumed Rs 5 lakh give the rest. No customer has seen these prices, and the number of paying teams has not been sized. One seat of MATLAB, Simulink, Simscape and Simscape Battery lists at US$13,180 perpetual, September 2026.</a:t>
+            </a:r>
+          </a:p>
+          <a:p>
+            <a:r>
               <a:t>Build cost: about Rs 35 crore over 3 years and 100.5 person-years for the full product vision. An estimate from sourced salary rates and assumed staffing, cross-checked with COCOMO II. See reports/build_cost_v1/BUILD_COST.md. AspenTech fiscal 2024 R&amp;D was US$206.1 million.</a:t>
             </a:r>
           </a:p>
           <a:p>
             <a:r>
-              <a:t>KPIs: 54 module experiments and 194 data files in the Piombo et al. dataset, each file integrity-checked. 9 records are reserved for a final assessment and were never opened: 3 module tests and 6 Samsung cell records.</a:t>
+              <a:t>Safety and limits: no spare cell, so three cells is the smallest design that survives losing one. 25 W is the supply rating, and below about 21.6 W one cell stays under its limit. Bench safety steps are in the appendix. No user has tried the app yet.</a:t>
+            </a:r>
+          </a:p>
+          <a:p>
+            <a:r>
+              <a:t>KPIs: 54 module experiments in the Piombo et al. dataset, and 194 dataset files checksum-verified, including cell characterisation and calibration files. 9 records are reserved for a final assessment and were never opened: 3 module tests and 6 Samsung cell records.</a:t>
             </a:r>
           </a:p>
           <a:p>

--- a/reports/slide_v4/VOLT-FORGE_Round1_Slide.pptx
+++ b/reports/slide_v4/VOLT-FORGE_Round1_Slide.pptx
@@ -581,6 +581,11 @@
           <a:p>
             <a:r>
               <a:t>KPIs: 54 module experiments in the Piombo et al. dataset, and 194 dataset files checksum-verified, including cell characterisation and calibration files. 9 records are reserved for a final assessment and were never opened: 3 module tests and 6 Samsung cell records.</a:t>
+            </a:r>
+          </a:p>
+          <a:p>
+            <a:r>
+              <a:t>Link: the site shows the demo video first, then the real engine running in the visitor's browser. The AI uses Gemini through a small server function.</a:t>
             </a:r>
           </a:p>
           <a:p>
@@ -6618,7 +6623,15 @@
                   </a:outerShdw>
                 </a:effectLst>
               </a:rPr>
-              <a:t>Team Details</a:t>
+              <a:t>Team StratWise</a:t>
+            </a:r>
+          </a:p>
+          <a:p>
+            <a:pPr>
+              <a:defRPr sz="1800" b="0"/>
+            </a:pPr>
+            <a:r>
+              <a:t>Shubhra Arora, Jai Kaushik, Sanya Bansal</a:t>
             </a:r>
           </a:p>
         </p:txBody>
@@ -6823,6 +6836,92 @@
           </a:prstGeom>
         </p:spPr>
       </p:pic>
+      <p:sp>
+        <p:nvSpPr>
+          <p:cNvPr id="9" name="site link">
+            <a:hlinkClick r:id="rId5"/>
+          </p:cNvPr>
+          <p:cNvSpPr/>
+          <p:nvPr/>
+        </p:nvSpPr>
+        <p:spPr>
+          <a:xfrm>
+            <a:off x="6352480" y="723900"/>
+            <a:ext cx="1339552" cy="190500"/>
+          </a:xfrm>
+          <a:prstGeom prst="rect">
+            <a:avLst/>
+          </a:prstGeom>
+          <a:noFill/>
+          <a:ln>
+            <a:noFill/>
+          </a:ln>
+        </p:spPr>
+        <p:style>
+          <a:lnRef idx="1">
+            <a:schemeClr val="accent1"/>
+          </a:lnRef>
+          <a:fillRef idx="3">
+            <a:schemeClr val="accent1"/>
+          </a:fillRef>
+          <a:effectRef idx="2">
+            <a:schemeClr val="accent1"/>
+          </a:effectRef>
+          <a:fontRef idx="minor">
+            <a:schemeClr val="lt1"/>
+          </a:fontRef>
+        </p:style>
+        <p:txBody>
+          <a:bodyPr rtlCol="0" anchor="ctr"/>
+          <a:lstStyle/>
+          <a:p>
+            <a:pPr algn="ctr"/>
+          </a:p>
+        </p:txBody>
+      </p:sp>
+      <p:sp>
+        <p:nvSpPr>
+          <p:cNvPr id="10" name="appendix link">
+            <a:hlinkClick r:id="rId6"/>
+          </p:cNvPr>
+          <p:cNvSpPr/>
+          <p:nvPr/>
+        </p:nvSpPr>
+        <p:spPr>
+          <a:xfrm>
+            <a:off x="6419254" y="6096000"/>
+            <a:ext cx="1954609" cy="196850"/>
+          </a:xfrm>
+          <a:prstGeom prst="rect">
+            <a:avLst/>
+          </a:prstGeom>
+          <a:noFill/>
+          <a:ln>
+            <a:noFill/>
+          </a:ln>
+        </p:spPr>
+        <p:style>
+          <a:lnRef idx="1">
+            <a:schemeClr val="accent1"/>
+          </a:lnRef>
+          <a:fillRef idx="3">
+            <a:schemeClr val="accent1"/>
+          </a:fillRef>
+          <a:effectRef idx="2">
+            <a:schemeClr val="accent1"/>
+          </a:effectRef>
+          <a:fontRef idx="minor">
+            <a:schemeClr val="lt1"/>
+          </a:fontRef>
+        </p:style>
+        <p:txBody>
+          <a:bodyPr rtlCol="0" anchor="ctr"/>
+          <a:lstStyle/>
+          <a:p>
+            <a:pPr algn="ctr"/>
+          </a:p>
+        </p:txBody>
+      </p:sp>
     </p:spTree>
     <p:extLst>
       <p:ext uri="{BB962C8B-B14F-4D97-AF65-F5344CB8AC3E}">

--- a/reports/slide_v4/VOLT-FORGE_Round1_Slide.pptx
+++ b/reports/slide_v4/VOLT-FORGE_Round1_Slide.pptx
@@ -580,7 +580,7 @@
           </a:p>
           <a:p>
             <a:r>
-              <a:t>KPIs: 54 module experiments in the Piombo et al. dataset, and 194 dataset files checksum-verified, including cell characterisation and calibration files. 9 records are reserved for a final assessment and were never opened: 3 module tests and 6 Samsung cell records.</a:t>
+              <a:t>KPIs: 54 module experiments in the Piombo et al. dataset, and 194 dataset files checksum-verified, including cell characterisation and calibration files. PyBaMM, an independent solver, matched voltage and heat in 15 of 15 cases. That shows the maths is sound, not that the model matches real cells. 9 records stay closed for a later exam.</a:t>
             </a:r>
           </a:p>
           <a:p>
